--- a/260418_add/supplefigure_260420/SuppFig_S19_external_validation_sensitivity.pptx
+++ b/260418_add/supplefigure_260420/SuppFig_S19_external_validation_sensitivity.pptx
@@ -3156,47 +3156,55 @@
                 </a:solidFill>
                 <a:latin typeface="Arial"/>
               </a:rPr>
-              <a:t>Restricted 5-cohort vs full 9-cohort sensitivity meta (7 signatures × 2 Z values)</a:t>
-            </a:r>
-          </a:p>
-        </p:txBody>
-      </p:sp>
-      <p:cxnSp>
-        <p:nvCxnSpPr>
-          <p:cNvPr id="4" name="Connector 3"/>
-          <p:cNvCxnSpPr/>
-          <p:nvPr/>
-        </p:nvCxnSpPr>
-        <p:spPr>
-          <a:xfrm>
-            <a:off x="3200400" y="5760720"/>
-            <a:ext cx="7772400" cy="0"/>
-          </a:xfrm>
-          <a:prstGeom prst="line">
-            <a:avLst/>
-          </a:prstGeom>
-          <a:ln w="12700">
-            <a:solidFill>
-              <a:srgbClr val="222222"/>
-            </a:solidFill>
+              <a:t>Restricted 5-cohort vs full 9-cohort sensitivity forest (Litchfield 2021 paired-diamond motif)</a:t>
+            </a:r>
+          </a:p>
+        </p:txBody>
+      </p:sp>
+      <p:sp>
+        <p:nvSpPr>
+          <p:cNvPr id="4" name="Rectangle 3"/>
+          <p:cNvSpPr/>
+          <p:nvPr/>
+        </p:nvSpPr>
+        <p:spPr>
+          <a:xfrm>
+            <a:off x="7323038" y="1188720"/>
+            <a:ext cx="3375442" cy="4572000"/>
+          </a:xfrm>
+          <a:prstGeom prst="rect">
+            <a:avLst/>
+          </a:prstGeom>
+          <a:solidFill>
+            <a:srgbClr val="EEF7F4"/>
+          </a:solidFill>
+          <a:ln>
+            <a:noFill/>
           </a:ln>
           <a:effectLst/>
         </p:spPr>
         <p:style>
-          <a:lnRef idx="2">
+          <a:lnRef idx="1">
             <a:schemeClr val="accent1"/>
           </a:lnRef>
-          <a:fillRef idx="0">
+          <a:fillRef idx="3">
             <a:schemeClr val="accent1"/>
           </a:fillRef>
-          <a:effectRef idx="1">
+          <a:effectRef idx="2">
             <a:schemeClr val="accent1"/>
           </a:effectRef>
           <a:fontRef idx="minor">
-            <a:schemeClr val="tx1"/>
+            <a:schemeClr val="lt1"/>
           </a:fontRef>
         </p:style>
-      </p:cxnSp>
+        <p:txBody>
+          <a:bodyPr rtlCol="0" anchor="ctr"/>
+          <a:lstStyle/>
+          <a:p>
+            <a:pPr algn="ctr"/>
+          </a:p>
+        </p:txBody>
+      </p:sp>
       <p:cxnSp>
         <p:nvCxnSpPr>
           <p:cNvPr id="5" name="Connector 4"/>
@@ -3205,8 +3213,8 @@
         </p:nvCxnSpPr>
         <p:spPr>
           <a:xfrm>
-            <a:off x="3200400" y="1188720"/>
-            <a:ext cx="0" cy="4572000"/>
+            <a:off x="2926080" y="5760720"/>
+            <a:ext cx="7772400" cy="0"/>
           </a:xfrm>
           <a:prstGeom prst="line">
             <a:avLst/>
@@ -3241,15 +3249,15 @@
         </p:nvCxnSpPr>
         <p:spPr>
           <a:xfrm>
-            <a:off x="10972800" y="1188720"/>
+            <a:off x="2926080" y="1188720"/>
             <a:ext cx="0" cy="4572000"/>
           </a:xfrm>
           <a:prstGeom prst="line">
             <a:avLst/>
           </a:prstGeom>
-          <a:ln w="6350">
+          <a:ln w="12700">
             <a:solidFill>
-              <a:srgbClr val="DDDDDD"/>
+              <a:srgbClr val="222222"/>
             </a:solidFill>
           </a:ln>
           <a:effectLst/>
@@ -3277,8 +3285,8 @@
         </p:nvCxnSpPr>
         <p:spPr>
           <a:xfrm>
-            <a:off x="3200400" y="1188720"/>
-            <a:ext cx="7772400" cy="0"/>
+            <a:off x="10698480" y="1188720"/>
+            <a:ext cx="0" cy="4572000"/>
           </a:xfrm>
           <a:prstGeom prst="line">
             <a:avLst/>
@@ -3313,627 +3321,15 @@
         </p:nvCxnSpPr>
         <p:spPr>
           <a:xfrm>
-            <a:off x="3200400" y="5760720"/>
-            <a:ext cx="0" cy="64008"/>
+            <a:off x="2926080" y="1188720"/>
+            <a:ext cx="7772400" cy="0"/>
           </a:xfrm>
           <a:prstGeom prst="line">
             <a:avLst/>
           </a:prstGeom>
-          <a:ln w="9525">
+          <a:ln w="6350">
             <a:solidFill>
-              <a:srgbClr val="222222"/>
-            </a:solidFill>
-          </a:ln>
-          <a:effectLst/>
-        </p:spPr>
-        <p:style>
-          <a:lnRef idx="2">
-            <a:schemeClr val="accent1"/>
-          </a:lnRef>
-          <a:fillRef idx="0">
-            <a:schemeClr val="accent1"/>
-          </a:fillRef>
-          <a:effectRef idx="1">
-            <a:schemeClr val="accent1"/>
-          </a:effectRef>
-          <a:fontRef idx="minor">
-            <a:schemeClr val="tx1"/>
-          </a:fontRef>
-        </p:style>
-      </p:cxnSp>
-      <p:sp>
-        <p:nvSpPr>
-          <p:cNvPr id="9" name="TextBox 8"/>
-          <p:cNvSpPr txBox="1"/>
-          <p:nvPr/>
-        </p:nvSpPr>
-        <p:spPr>
-          <a:xfrm>
-            <a:off x="2834640" y="5815584"/>
-            <a:ext cx="731520" cy="164592"/>
-          </a:xfrm>
-          <a:prstGeom prst="rect">
-            <a:avLst/>
-          </a:prstGeom>
-          <a:noFill/>
-          <a:effectLst/>
-        </p:spPr>
-        <p:txBody>
-          <a:bodyPr wrap="square" lIns="0" rIns="0" tIns="0" bIns="0" anchor="t">
-            <a:spAutoFit/>
-          </a:bodyPr>
-          <a:lstStyle/>
-          <a:p>
-            <a:pPr algn="ctr"/>
-            <a:r>
-              <a:rPr sz="800" b="0" i="0">
-                <a:solidFill>
-                  <a:srgbClr val="222222"/>
-                </a:solidFill>
-                <a:latin typeface="Arial"/>
-              </a:rPr>
-              <a:t>-2</a:t>
-            </a:r>
-          </a:p>
-        </p:txBody>
-      </p:sp>
-      <p:cxnSp>
-        <p:nvCxnSpPr>
-          <p:cNvPr id="10" name="Connector 9"/>
-          <p:cNvCxnSpPr/>
-          <p:nvPr/>
-        </p:nvCxnSpPr>
-        <p:spPr>
-          <a:xfrm>
-            <a:off x="4310743" y="5760720"/>
-            <a:ext cx="0" cy="64008"/>
-          </a:xfrm>
-          <a:prstGeom prst="line">
-            <a:avLst/>
-          </a:prstGeom>
-          <a:ln w="9525">
-            <a:solidFill>
-              <a:srgbClr val="222222"/>
-            </a:solidFill>
-          </a:ln>
-          <a:effectLst/>
-        </p:spPr>
-        <p:style>
-          <a:lnRef idx="2">
-            <a:schemeClr val="accent1"/>
-          </a:lnRef>
-          <a:fillRef idx="0">
-            <a:schemeClr val="accent1"/>
-          </a:fillRef>
-          <a:effectRef idx="1">
-            <a:schemeClr val="accent1"/>
-          </a:effectRef>
-          <a:fontRef idx="minor">
-            <a:schemeClr val="tx1"/>
-          </a:fontRef>
-        </p:style>
-      </p:cxnSp>
-      <p:sp>
-        <p:nvSpPr>
-          <p:cNvPr id="11" name="TextBox 10"/>
-          <p:cNvSpPr txBox="1"/>
-          <p:nvPr/>
-        </p:nvSpPr>
-        <p:spPr>
-          <a:xfrm>
-            <a:off x="3944983" y="5815584"/>
-            <a:ext cx="731520" cy="164592"/>
-          </a:xfrm>
-          <a:prstGeom prst="rect">
-            <a:avLst/>
-          </a:prstGeom>
-          <a:noFill/>
-          <a:effectLst/>
-        </p:spPr>
-        <p:txBody>
-          <a:bodyPr wrap="square" lIns="0" rIns="0" tIns="0" bIns="0" anchor="t">
-            <a:spAutoFit/>
-          </a:bodyPr>
-          <a:lstStyle/>
-          <a:p>
-            <a:pPr algn="ctr"/>
-            <a:r>
-              <a:rPr sz="800" b="0" i="0">
-                <a:solidFill>
-                  <a:srgbClr val="222222"/>
-                </a:solidFill>
-                <a:latin typeface="Arial"/>
-              </a:rPr>
-              <a:t>-1</a:t>
-            </a:r>
-          </a:p>
-        </p:txBody>
-      </p:sp>
-      <p:cxnSp>
-        <p:nvCxnSpPr>
-          <p:cNvPr id="12" name="Connector 11"/>
-          <p:cNvCxnSpPr/>
-          <p:nvPr/>
-        </p:nvCxnSpPr>
-        <p:spPr>
-          <a:xfrm>
-            <a:off x="5421086" y="5760720"/>
-            <a:ext cx="0" cy="64008"/>
-          </a:xfrm>
-          <a:prstGeom prst="line">
-            <a:avLst/>
-          </a:prstGeom>
-          <a:ln w="9525">
-            <a:solidFill>
-              <a:srgbClr val="222222"/>
-            </a:solidFill>
-          </a:ln>
-          <a:effectLst/>
-        </p:spPr>
-        <p:style>
-          <a:lnRef idx="2">
-            <a:schemeClr val="accent1"/>
-          </a:lnRef>
-          <a:fillRef idx="0">
-            <a:schemeClr val="accent1"/>
-          </a:fillRef>
-          <a:effectRef idx="1">
-            <a:schemeClr val="accent1"/>
-          </a:effectRef>
-          <a:fontRef idx="minor">
-            <a:schemeClr val="tx1"/>
-          </a:fontRef>
-        </p:style>
-      </p:cxnSp>
-      <p:sp>
-        <p:nvSpPr>
-          <p:cNvPr id="13" name="TextBox 12"/>
-          <p:cNvSpPr txBox="1"/>
-          <p:nvPr/>
-        </p:nvSpPr>
-        <p:spPr>
-          <a:xfrm>
-            <a:off x="5055326" y="5815584"/>
-            <a:ext cx="731520" cy="164592"/>
-          </a:xfrm>
-          <a:prstGeom prst="rect">
-            <a:avLst/>
-          </a:prstGeom>
-          <a:noFill/>
-          <a:effectLst/>
-        </p:spPr>
-        <p:txBody>
-          <a:bodyPr wrap="square" lIns="0" rIns="0" tIns="0" bIns="0" anchor="t">
-            <a:spAutoFit/>
-          </a:bodyPr>
-          <a:lstStyle/>
-          <a:p>
-            <a:pPr algn="ctr"/>
-            <a:r>
-              <a:rPr sz="800" b="0" i="0">
-                <a:solidFill>
-                  <a:srgbClr val="222222"/>
-                </a:solidFill>
-                <a:latin typeface="Arial"/>
-              </a:rPr>
-              <a:t>0</a:t>
-            </a:r>
-          </a:p>
-        </p:txBody>
-      </p:sp>
-      <p:cxnSp>
-        <p:nvCxnSpPr>
-          <p:cNvPr id="14" name="Connector 13"/>
-          <p:cNvCxnSpPr/>
-          <p:nvPr/>
-        </p:nvCxnSpPr>
-        <p:spPr>
-          <a:xfrm>
-            <a:off x="6531429" y="5760720"/>
-            <a:ext cx="0" cy="64008"/>
-          </a:xfrm>
-          <a:prstGeom prst="line">
-            <a:avLst/>
-          </a:prstGeom>
-          <a:ln w="9525">
-            <a:solidFill>
-              <a:srgbClr val="222222"/>
-            </a:solidFill>
-          </a:ln>
-          <a:effectLst/>
-        </p:spPr>
-        <p:style>
-          <a:lnRef idx="2">
-            <a:schemeClr val="accent1"/>
-          </a:lnRef>
-          <a:fillRef idx="0">
-            <a:schemeClr val="accent1"/>
-          </a:fillRef>
-          <a:effectRef idx="1">
-            <a:schemeClr val="accent1"/>
-          </a:effectRef>
-          <a:fontRef idx="minor">
-            <a:schemeClr val="tx1"/>
-          </a:fontRef>
-        </p:style>
-      </p:cxnSp>
-      <p:sp>
-        <p:nvSpPr>
-          <p:cNvPr id="15" name="TextBox 14"/>
-          <p:cNvSpPr txBox="1"/>
-          <p:nvPr/>
-        </p:nvSpPr>
-        <p:spPr>
-          <a:xfrm>
-            <a:off x="6165669" y="5815584"/>
-            <a:ext cx="731520" cy="164592"/>
-          </a:xfrm>
-          <a:prstGeom prst="rect">
-            <a:avLst/>
-          </a:prstGeom>
-          <a:noFill/>
-          <a:effectLst/>
-        </p:spPr>
-        <p:txBody>
-          <a:bodyPr wrap="square" lIns="0" rIns="0" tIns="0" bIns="0" anchor="t">
-            <a:spAutoFit/>
-          </a:bodyPr>
-          <a:lstStyle/>
-          <a:p>
-            <a:pPr algn="ctr"/>
-            <a:r>
-              <a:rPr sz="800" b="0" i="0">
-                <a:solidFill>
-                  <a:srgbClr val="222222"/>
-                </a:solidFill>
-                <a:latin typeface="Arial"/>
-              </a:rPr>
-              <a:t>1</a:t>
-            </a:r>
-          </a:p>
-        </p:txBody>
-      </p:sp>
-      <p:cxnSp>
-        <p:nvCxnSpPr>
-          <p:cNvPr id="16" name="Connector 15"/>
-          <p:cNvCxnSpPr/>
-          <p:nvPr/>
-        </p:nvCxnSpPr>
-        <p:spPr>
-          <a:xfrm>
-            <a:off x="7641771" y="5760720"/>
-            <a:ext cx="0" cy="64008"/>
-          </a:xfrm>
-          <a:prstGeom prst="line">
-            <a:avLst/>
-          </a:prstGeom>
-          <a:ln w="9525">
-            <a:solidFill>
-              <a:srgbClr val="222222"/>
-            </a:solidFill>
-          </a:ln>
-          <a:effectLst/>
-        </p:spPr>
-        <p:style>
-          <a:lnRef idx="2">
-            <a:schemeClr val="accent1"/>
-          </a:lnRef>
-          <a:fillRef idx="0">
-            <a:schemeClr val="accent1"/>
-          </a:fillRef>
-          <a:effectRef idx="1">
-            <a:schemeClr val="accent1"/>
-          </a:effectRef>
-          <a:fontRef idx="minor">
-            <a:schemeClr val="tx1"/>
-          </a:fontRef>
-        </p:style>
-      </p:cxnSp>
-      <p:sp>
-        <p:nvSpPr>
-          <p:cNvPr id="17" name="TextBox 16"/>
-          <p:cNvSpPr txBox="1"/>
-          <p:nvPr/>
-        </p:nvSpPr>
-        <p:spPr>
-          <a:xfrm>
-            <a:off x="7276011" y="5815584"/>
-            <a:ext cx="731520" cy="164592"/>
-          </a:xfrm>
-          <a:prstGeom prst="rect">
-            <a:avLst/>
-          </a:prstGeom>
-          <a:noFill/>
-          <a:effectLst/>
-        </p:spPr>
-        <p:txBody>
-          <a:bodyPr wrap="square" lIns="0" rIns="0" tIns="0" bIns="0" anchor="t">
-            <a:spAutoFit/>
-          </a:bodyPr>
-          <a:lstStyle/>
-          <a:p>
-            <a:pPr algn="ctr"/>
-            <a:r>
-              <a:rPr sz="800" b="0" i="0">
-                <a:solidFill>
-                  <a:srgbClr val="222222"/>
-                </a:solidFill>
-                <a:latin typeface="Arial"/>
-              </a:rPr>
-              <a:t>2</a:t>
-            </a:r>
-          </a:p>
-        </p:txBody>
-      </p:sp>
-      <p:cxnSp>
-        <p:nvCxnSpPr>
-          <p:cNvPr id="18" name="Connector 17"/>
-          <p:cNvCxnSpPr/>
-          <p:nvPr/>
-        </p:nvCxnSpPr>
-        <p:spPr>
-          <a:xfrm>
-            <a:off x="8752114" y="5760720"/>
-            <a:ext cx="0" cy="64008"/>
-          </a:xfrm>
-          <a:prstGeom prst="line">
-            <a:avLst/>
-          </a:prstGeom>
-          <a:ln w="9525">
-            <a:solidFill>
-              <a:srgbClr val="222222"/>
-            </a:solidFill>
-          </a:ln>
-          <a:effectLst/>
-        </p:spPr>
-        <p:style>
-          <a:lnRef idx="2">
-            <a:schemeClr val="accent1"/>
-          </a:lnRef>
-          <a:fillRef idx="0">
-            <a:schemeClr val="accent1"/>
-          </a:fillRef>
-          <a:effectRef idx="1">
-            <a:schemeClr val="accent1"/>
-          </a:effectRef>
-          <a:fontRef idx="minor">
-            <a:schemeClr val="tx1"/>
-          </a:fontRef>
-        </p:style>
-      </p:cxnSp>
-      <p:sp>
-        <p:nvSpPr>
-          <p:cNvPr id="19" name="TextBox 18"/>
-          <p:cNvSpPr txBox="1"/>
-          <p:nvPr/>
-        </p:nvSpPr>
-        <p:spPr>
-          <a:xfrm>
-            <a:off x="8386354" y="5815584"/>
-            <a:ext cx="731520" cy="164592"/>
-          </a:xfrm>
-          <a:prstGeom prst="rect">
-            <a:avLst/>
-          </a:prstGeom>
-          <a:noFill/>
-          <a:effectLst/>
-        </p:spPr>
-        <p:txBody>
-          <a:bodyPr wrap="square" lIns="0" rIns="0" tIns="0" bIns="0" anchor="t">
-            <a:spAutoFit/>
-          </a:bodyPr>
-          <a:lstStyle/>
-          <a:p>
-            <a:pPr algn="ctr"/>
-            <a:r>
-              <a:rPr sz="800" b="0" i="0">
-                <a:solidFill>
-                  <a:srgbClr val="222222"/>
-                </a:solidFill>
-                <a:latin typeface="Arial"/>
-              </a:rPr>
-              <a:t>3</a:t>
-            </a:r>
-          </a:p>
-        </p:txBody>
-      </p:sp>
-      <p:cxnSp>
-        <p:nvCxnSpPr>
-          <p:cNvPr id="20" name="Connector 19"/>
-          <p:cNvCxnSpPr/>
-          <p:nvPr/>
-        </p:nvCxnSpPr>
-        <p:spPr>
-          <a:xfrm>
-            <a:off x="9862457" y="5760720"/>
-            <a:ext cx="0" cy="64008"/>
-          </a:xfrm>
-          <a:prstGeom prst="line">
-            <a:avLst/>
-          </a:prstGeom>
-          <a:ln w="9525">
-            <a:solidFill>
-              <a:srgbClr val="222222"/>
-            </a:solidFill>
-          </a:ln>
-          <a:effectLst/>
-        </p:spPr>
-        <p:style>
-          <a:lnRef idx="2">
-            <a:schemeClr val="accent1"/>
-          </a:lnRef>
-          <a:fillRef idx="0">
-            <a:schemeClr val="accent1"/>
-          </a:fillRef>
-          <a:effectRef idx="1">
-            <a:schemeClr val="accent1"/>
-          </a:effectRef>
-          <a:fontRef idx="minor">
-            <a:schemeClr val="tx1"/>
-          </a:fontRef>
-        </p:style>
-      </p:cxnSp>
-      <p:sp>
-        <p:nvSpPr>
-          <p:cNvPr id="21" name="TextBox 20"/>
-          <p:cNvSpPr txBox="1"/>
-          <p:nvPr/>
-        </p:nvSpPr>
-        <p:spPr>
-          <a:xfrm>
-            <a:off x="9496697" y="5815584"/>
-            <a:ext cx="731520" cy="164592"/>
-          </a:xfrm>
-          <a:prstGeom prst="rect">
-            <a:avLst/>
-          </a:prstGeom>
-          <a:noFill/>
-          <a:effectLst/>
-        </p:spPr>
-        <p:txBody>
-          <a:bodyPr wrap="square" lIns="0" rIns="0" tIns="0" bIns="0" anchor="t">
-            <a:spAutoFit/>
-          </a:bodyPr>
-          <a:lstStyle/>
-          <a:p>
-            <a:pPr algn="ctr"/>
-            <a:r>
-              <a:rPr sz="800" b="0" i="0">
-                <a:solidFill>
-                  <a:srgbClr val="222222"/>
-                </a:solidFill>
-                <a:latin typeface="Arial"/>
-              </a:rPr>
-              <a:t>4</a:t>
-            </a:r>
-          </a:p>
-        </p:txBody>
-      </p:sp>
-      <p:cxnSp>
-        <p:nvCxnSpPr>
-          <p:cNvPr id="22" name="Connector 21"/>
-          <p:cNvCxnSpPr/>
-          <p:nvPr/>
-        </p:nvCxnSpPr>
-        <p:spPr>
-          <a:xfrm>
-            <a:off x="10972800" y="5760720"/>
-            <a:ext cx="0" cy="64008"/>
-          </a:xfrm>
-          <a:prstGeom prst="line">
-            <a:avLst/>
-          </a:prstGeom>
-          <a:ln w="9525">
-            <a:solidFill>
-              <a:srgbClr val="222222"/>
-            </a:solidFill>
-          </a:ln>
-          <a:effectLst/>
-        </p:spPr>
-        <p:style>
-          <a:lnRef idx="2">
-            <a:schemeClr val="accent1"/>
-          </a:lnRef>
-          <a:fillRef idx="0">
-            <a:schemeClr val="accent1"/>
-          </a:fillRef>
-          <a:effectRef idx="1">
-            <a:schemeClr val="accent1"/>
-          </a:effectRef>
-          <a:fontRef idx="minor">
-            <a:schemeClr val="tx1"/>
-          </a:fontRef>
-        </p:style>
-      </p:cxnSp>
-      <p:sp>
-        <p:nvSpPr>
-          <p:cNvPr id="23" name="TextBox 22"/>
-          <p:cNvSpPr txBox="1"/>
-          <p:nvPr/>
-        </p:nvSpPr>
-        <p:spPr>
-          <a:xfrm>
-            <a:off x="10607040" y="5815584"/>
-            <a:ext cx="731520" cy="164592"/>
-          </a:xfrm>
-          <a:prstGeom prst="rect">
-            <a:avLst/>
-          </a:prstGeom>
-          <a:noFill/>
-          <a:effectLst/>
-        </p:spPr>
-        <p:txBody>
-          <a:bodyPr wrap="square" lIns="0" rIns="0" tIns="0" bIns="0" anchor="t">
-            <a:spAutoFit/>
-          </a:bodyPr>
-          <a:lstStyle/>
-          <a:p>
-            <a:pPr algn="ctr"/>
-            <a:r>
-              <a:rPr sz="800" b="0" i="0">
-                <a:solidFill>
-                  <a:srgbClr val="222222"/>
-                </a:solidFill>
-                <a:latin typeface="Arial"/>
-              </a:rPr>
-              <a:t>5</a:t>
-            </a:r>
-          </a:p>
-        </p:txBody>
-      </p:sp>
-      <p:sp>
-        <p:nvSpPr>
-          <p:cNvPr id="24" name="TextBox 23"/>
-          <p:cNvSpPr txBox="1"/>
-          <p:nvPr/>
-        </p:nvSpPr>
-        <p:spPr>
-          <a:xfrm>
-            <a:off x="3200400" y="6108192"/>
-            <a:ext cx="7772400" cy="228600"/>
-          </a:xfrm>
-          <a:prstGeom prst="rect">
-            <a:avLst/>
-          </a:prstGeom>
-          <a:noFill/>
-          <a:effectLst/>
-        </p:spPr>
-        <p:txBody>
-          <a:bodyPr wrap="square" lIns="0" rIns="0" tIns="0" bIns="0" anchor="t">
-            <a:spAutoFit/>
-          </a:bodyPr>
-          <a:lstStyle/>
-          <a:p>
-            <a:pPr algn="ctr"/>
-            <a:r>
-              <a:rPr sz="900" b="1" i="0">
-                <a:solidFill>
-                  <a:srgbClr val="222222"/>
-                </a:solidFill>
-                <a:latin typeface="Arial"/>
-              </a:rPr>
-              <a:t>Stouffer Z (restricted 5-cohort = solid diamond; full 9-cohort approx = hollow)</a:t>
-            </a:r>
-          </a:p>
-        </p:txBody>
-      </p:sp>
-      <p:cxnSp>
-        <p:nvCxnSpPr>
-          <p:cNvPr id="25" name="Connector 24"/>
-          <p:cNvCxnSpPr/>
-          <p:nvPr/>
-        </p:nvCxnSpPr>
-        <p:spPr>
-          <a:xfrm>
-            <a:off x="5421086" y="1188720"/>
-            <a:ext cx="0" cy="4572000"/>
-          </a:xfrm>
-          <a:prstGeom prst="line">
-            <a:avLst/>
-          </a:prstGeom>
-          <a:ln w="15240">
-            <a:solidFill>
-              <a:srgbClr val="222222"/>
+              <a:srgbClr val="DDDDDD"/>
             </a:solidFill>
           </a:ln>
           <a:effectLst/>
@@ -3955,23 +3351,634 @@
       </p:cxnSp>
       <p:cxnSp>
         <p:nvCxnSpPr>
+          <p:cNvPr id="9" name="Connector 8"/>
+          <p:cNvCxnSpPr/>
+          <p:nvPr/>
+        </p:nvCxnSpPr>
+        <p:spPr>
+          <a:xfrm>
+            <a:off x="2926080" y="5760720"/>
+            <a:ext cx="0" cy="64008"/>
+          </a:xfrm>
+          <a:prstGeom prst="line">
+            <a:avLst/>
+          </a:prstGeom>
+          <a:ln w="9525">
+            <a:solidFill>
+              <a:srgbClr val="222222"/>
+            </a:solidFill>
+          </a:ln>
+          <a:effectLst/>
+        </p:spPr>
+        <p:style>
+          <a:lnRef idx="2">
+            <a:schemeClr val="accent1"/>
+          </a:lnRef>
+          <a:fillRef idx="0">
+            <a:schemeClr val="accent1"/>
+          </a:fillRef>
+          <a:effectRef idx="1">
+            <a:schemeClr val="accent1"/>
+          </a:effectRef>
+          <a:fontRef idx="minor">
+            <a:schemeClr val="tx1"/>
+          </a:fontRef>
+        </p:style>
+      </p:cxnSp>
+      <p:sp>
+        <p:nvSpPr>
+          <p:cNvPr id="10" name="TextBox 9"/>
+          <p:cNvSpPr txBox="1"/>
+          <p:nvPr/>
+        </p:nvSpPr>
+        <p:spPr>
+          <a:xfrm>
+            <a:off x="2560320" y="5815584"/>
+            <a:ext cx="731520" cy="164592"/>
+          </a:xfrm>
+          <a:prstGeom prst="rect">
+            <a:avLst/>
+          </a:prstGeom>
+          <a:noFill/>
+          <a:effectLst/>
+        </p:spPr>
+        <p:txBody>
+          <a:bodyPr wrap="square" lIns="0" rIns="0" tIns="0" bIns="0" anchor="t">
+            <a:spAutoFit/>
+          </a:bodyPr>
+          <a:lstStyle/>
+          <a:p>
+            <a:pPr algn="ctr"/>
+            <a:r>
+              <a:rPr sz="800" b="0" i="0">
+                <a:solidFill>
+                  <a:srgbClr val="222222"/>
+                </a:solidFill>
+                <a:latin typeface="Arial"/>
+              </a:rPr>
+              <a:t>-2</a:t>
+            </a:r>
+          </a:p>
+        </p:txBody>
+      </p:sp>
+      <p:cxnSp>
+        <p:nvCxnSpPr>
+          <p:cNvPr id="11" name="Connector 10"/>
+          <p:cNvCxnSpPr/>
+          <p:nvPr/>
+        </p:nvCxnSpPr>
+        <p:spPr>
+          <a:xfrm>
+            <a:off x="4036423" y="5760720"/>
+            <a:ext cx="0" cy="64008"/>
+          </a:xfrm>
+          <a:prstGeom prst="line">
+            <a:avLst/>
+          </a:prstGeom>
+          <a:ln w="9525">
+            <a:solidFill>
+              <a:srgbClr val="222222"/>
+            </a:solidFill>
+          </a:ln>
+          <a:effectLst/>
+        </p:spPr>
+        <p:style>
+          <a:lnRef idx="2">
+            <a:schemeClr val="accent1"/>
+          </a:lnRef>
+          <a:fillRef idx="0">
+            <a:schemeClr val="accent1"/>
+          </a:fillRef>
+          <a:effectRef idx="1">
+            <a:schemeClr val="accent1"/>
+          </a:effectRef>
+          <a:fontRef idx="minor">
+            <a:schemeClr val="tx1"/>
+          </a:fontRef>
+        </p:style>
+      </p:cxnSp>
+      <p:sp>
+        <p:nvSpPr>
+          <p:cNvPr id="12" name="TextBox 11"/>
+          <p:cNvSpPr txBox="1"/>
+          <p:nvPr/>
+        </p:nvSpPr>
+        <p:spPr>
+          <a:xfrm>
+            <a:off x="3670663" y="5815584"/>
+            <a:ext cx="731520" cy="164592"/>
+          </a:xfrm>
+          <a:prstGeom prst="rect">
+            <a:avLst/>
+          </a:prstGeom>
+          <a:noFill/>
+          <a:effectLst/>
+        </p:spPr>
+        <p:txBody>
+          <a:bodyPr wrap="square" lIns="0" rIns="0" tIns="0" bIns="0" anchor="t">
+            <a:spAutoFit/>
+          </a:bodyPr>
+          <a:lstStyle/>
+          <a:p>
+            <a:pPr algn="ctr"/>
+            <a:r>
+              <a:rPr sz="800" b="0" i="0">
+                <a:solidFill>
+                  <a:srgbClr val="222222"/>
+                </a:solidFill>
+                <a:latin typeface="Arial"/>
+              </a:rPr>
+              <a:t>-1</a:t>
+            </a:r>
+          </a:p>
+        </p:txBody>
+      </p:sp>
+      <p:cxnSp>
+        <p:nvCxnSpPr>
+          <p:cNvPr id="13" name="Connector 12"/>
+          <p:cNvCxnSpPr/>
+          <p:nvPr/>
+        </p:nvCxnSpPr>
+        <p:spPr>
+          <a:xfrm>
+            <a:off x="5146766" y="5760720"/>
+            <a:ext cx="0" cy="64008"/>
+          </a:xfrm>
+          <a:prstGeom prst="line">
+            <a:avLst/>
+          </a:prstGeom>
+          <a:ln w="9525">
+            <a:solidFill>
+              <a:srgbClr val="222222"/>
+            </a:solidFill>
+          </a:ln>
+          <a:effectLst/>
+        </p:spPr>
+        <p:style>
+          <a:lnRef idx="2">
+            <a:schemeClr val="accent1"/>
+          </a:lnRef>
+          <a:fillRef idx="0">
+            <a:schemeClr val="accent1"/>
+          </a:fillRef>
+          <a:effectRef idx="1">
+            <a:schemeClr val="accent1"/>
+          </a:effectRef>
+          <a:fontRef idx="minor">
+            <a:schemeClr val="tx1"/>
+          </a:fontRef>
+        </p:style>
+      </p:cxnSp>
+      <p:sp>
+        <p:nvSpPr>
+          <p:cNvPr id="14" name="TextBox 13"/>
+          <p:cNvSpPr txBox="1"/>
+          <p:nvPr/>
+        </p:nvSpPr>
+        <p:spPr>
+          <a:xfrm>
+            <a:off x="4781006" y="5815584"/>
+            <a:ext cx="731520" cy="164592"/>
+          </a:xfrm>
+          <a:prstGeom prst="rect">
+            <a:avLst/>
+          </a:prstGeom>
+          <a:noFill/>
+          <a:effectLst/>
+        </p:spPr>
+        <p:txBody>
+          <a:bodyPr wrap="square" lIns="0" rIns="0" tIns="0" bIns="0" anchor="t">
+            <a:spAutoFit/>
+          </a:bodyPr>
+          <a:lstStyle/>
+          <a:p>
+            <a:pPr algn="ctr"/>
+            <a:r>
+              <a:rPr sz="800" b="0" i="0">
+                <a:solidFill>
+                  <a:srgbClr val="222222"/>
+                </a:solidFill>
+                <a:latin typeface="Arial"/>
+              </a:rPr>
+              <a:t>0</a:t>
+            </a:r>
+          </a:p>
+        </p:txBody>
+      </p:sp>
+      <p:cxnSp>
+        <p:nvCxnSpPr>
+          <p:cNvPr id="15" name="Connector 14"/>
+          <p:cNvCxnSpPr/>
+          <p:nvPr/>
+        </p:nvCxnSpPr>
+        <p:spPr>
+          <a:xfrm>
+            <a:off x="6257109" y="5760720"/>
+            <a:ext cx="0" cy="64008"/>
+          </a:xfrm>
+          <a:prstGeom prst="line">
+            <a:avLst/>
+          </a:prstGeom>
+          <a:ln w="9525">
+            <a:solidFill>
+              <a:srgbClr val="222222"/>
+            </a:solidFill>
+          </a:ln>
+          <a:effectLst/>
+        </p:spPr>
+        <p:style>
+          <a:lnRef idx="2">
+            <a:schemeClr val="accent1"/>
+          </a:lnRef>
+          <a:fillRef idx="0">
+            <a:schemeClr val="accent1"/>
+          </a:fillRef>
+          <a:effectRef idx="1">
+            <a:schemeClr val="accent1"/>
+          </a:effectRef>
+          <a:fontRef idx="minor">
+            <a:schemeClr val="tx1"/>
+          </a:fontRef>
+        </p:style>
+      </p:cxnSp>
+      <p:sp>
+        <p:nvSpPr>
+          <p:cNvPr id="16" name="TextBox 15"/>
+          <p:cNvSpPr txBox="1"/>
+          <p:nvPr/>
+        </p:nvSpPr>
+        <p:spPr>
+          <a:xfrm>
+            <a:off x="5891349" y="5815584"/>
+            <a:ext cx="731520" cy="164592"/>
+          </a:xfrm>
+          <a:prstGeom prst="rect">
+            <a:avLst/>
+          </a:prstGeom>
+          <a:noFill/>
+          <a:effectLst/>
+        </p:spPr>
+        <p:txBody>
+          <a:bodyPr wrap="square" lIns="0" rIns="0" tIns="0" bIns="0" anchor="t">
+            <a:spAutoFit/>
+          </a:bodyPr>
+          <a:lstStyle/>
+          <a:p>
+            <a:pPr algn="ctr"/>
+            <a:r>
+              <a:rPr sz="800" b="0" i="0">
+                <a:solidFill>
+                  <a:srgbClr val="222222"/>
+                </a:solidFill>
+                <a:latin typeface="Arial"/>
+              </a:rPr>
+              <a:t>1</a:t>
+            </a:r>
+          </a:p>
+        </p:txBody>
+      </p:sp>
+      <p:cxnSp>
+        <p:nvCxnSpPr>
+          <p:cNvPr id="17" name="Connector 16"/>
+          <p:cNvCxnSpPr/>
+          <p:nvPr/>
+        </p:nvCxnSpPr>
+        <p:spPr>
+          <a:xfrm>
+            <a:off x="7367451" y="5760720"/>
+            <a:ext cx="0" cy="64008"/>
+          </a:xfrm>
+          <a:prstGeom prst="line">
+            <a:avLst/>
+          </a:prstGeom>
+          <a:ln w="9525">
+            <a:solidFill>
+              <a:srgbClr val="222222"/>
+            </a:solidFill>
+          </a:ln>
+          <a:effectLst/>
+        </p:spPr>
+        <p:style>
+          <a:lnRef idx="2">
+            <a:schemeClr val="accent1"/>
+          </a:lnRef>
+          <a:fillRef idx="0">
+            <a:schemeClr val="accent1"/>
+          </a:fillRef>
+          <a:effectRef idx="1">
+            <a:schemeClr val="accent1"/>
+          </a:effectRef>
+          <a:fontRef idx="minor">
+            <a:schemeClr val="tx1"/>
+          </a:fontRef>
+        </p:style>
+      </p:cxnSp>
+      <p:sp>
+        <p:nvSpPr>
+          <p:cNvPr id="18" name="TextBox 17"/>
+          <p:cNvSpPr txBox="1"/>
+          <p:nvPr/>
+        </p:nvSpPr>
+        <p:spPr>
+          <a:xfrm>
+            <a:off x="7001691" y="5815584"/>
+            <a:ext cx="731520" cy="164592"/>
+          </a:xfrm>
+          <a:prstGeom prst="rect">
+            <a:avLst/>
+          </a:prstGeom>
+          <a:noFill/>
+          <a:effectLst/>
+        </p:spPr>
+        <p:txBody>
+          <a:bodyPr wrap="square" lIns="0" rIns="0" tIns="0" bIns="0" anchor="t">
+            <a:spAutoFit/>
+          </a:bodyPr>
+          <a:lstStyle/>
+          <a:p>
+            <a:pPr algn="ctr"/>
+            <a:r>
+              <a:rPr sz="800" b="0" i="0">
+                <a:solidFill>
+                  <a:srgbClr val="222222"/>
+                </a:solidFill>
+                <a:latin typeface="Arial"/>
+              </a:rPr>
+              <a:t>2</a:t>
+            </a:r>
+          </a:p>
+        </p:txBody>
+      </p:sp>
+      <p:cxnSp>
+        <p:nvCxnSpPr>
+          <p:cNvPr id="19" name="Connector 18"/>
+          <p:cNvCxnSpPr/>
+          <p:nvPr/>
+        </p:nvCxnSpPr>
+        <p:spPr>
+          <a:xfrm>
+            <a:off x="8477794" y="5760720"/>
+            <a:ext cx="0" cy="64008"/>
+          </a:xfrm>
+          <a:prstGeom prst="line">
+            <a:avLst/>
+          </a:prstGeom>
+          <a:ln w="9525">
+            <a:solidFill>
+              <a:srgbClr val="222222"/>
+            </a:solidFill>
+          </a:ln>
+          <a:effectLst/>
+        </p:spPr>
+        <p:style>
+          <a:lnRef idx="2">
+            <a:schemeClr val="accent1"/>
+          </a:lnRef>
+          <a:fillRef idx="0">
+            <a:schemeClr val="accent1"/>
+          </a:fillRef>
+          <a:effectRef idx="1">
+            <a:schemeClr val="accent1"/>
+          </a:effectRef>
+          <a:fontRef idx="minor">
+            <a:schemeClr val="tx1"/>
+          </a:fontRef>
+        </p:style>
+      </p:cxnSp>
+      <p:sp>
+        <p:nvSpPr>
+          <p:cNvPr id="20" name="TextBox 19"/>
+          <p:cNvSpPr txBox="1"/>
+          <p:nvPr/>
+        </p:nvSpPr>
+        <p:spPr>
+          <a:xfrm>
+            <a:off x="8112034" y="5815584"/>
+            <a:ext cx="731520" cy="164592"/>
+          </a:xfrm>
+          <a:prstGeom prst="rect">
+            <a:avLst/>
+          </a:prstGeom>
+          <a:noFill/>
+          <a:effectLst/>
+        </p:spPr>
+        <p:txBody>
+          <a:bodyPr wrap="square" lIns="0" rIns="0" tIns="0" bIns="0" anchor="t">
+            <a:spAutoFit/>
+          </a:bodyPr>
+          <a:lstStyle/>
+          <a:p>
+            <a:pPr algn="ctr"/>
+            <a:r>
+              <a:rPr sz="800" b="0" i="0">
+                <a:solidFill>
+                  <a:srgbClr val="222222"/>
+                </a:solidFill>
+                <a:latin typeface="Arial"/>
+              </a:rPr>
+              <a:t>3</a:t>
+            </a:r>
+          </a:p>
+        </p:txBody>
+      </p:sp>
+      <p:cxnSp>
+        <p:nvCxnSpPr>
+          <p:cNvPr id="21" name="Connector 20"/>
+          <p:cNvCxnSpPr/>
+          <p:nvPr/>
+        </p:nvCxnSpPr>
+        <p:spPr>
+          <a:xfrm>
+            <a:off x="9588137" y="5760720"/>
+            <a:ext cx="0" cy="64008"/>
+          </a:xfrm>
+          <a:prstGeom prst="line">
+            <a:avLst/>
+          </a:prstGeom>
+          <a:ln w="9525">
+            <a:solidFill>
+              <a:srgbClr val="222222"/>
+            </a:solidFill>
+          </a:ln>
+          <a:effectLst/>
+        </p:spPr>
+        <p:style>
+          <a:lnRef idx="2">
+            <a:schemeClr val="accent1"/>
+          </a:lnRef>
+          <a:fillRef idx="0">
+            <a:schemeClr val="accent1"/>
+          </a:fillRef>
+          <a:effectRef idx="1">
+            <a:schemeClr val="accent1"/>
+          </a:effectRef>
+          <a:fontRef idx="minor">
+            <a:schemeClr val="tx1"/>
+          </a:fontRef>
+        </p:style>
+      </p:cxnSp>
+      <p:sp>
+        <p:nvSpPr>
+          <p:cNvPr id="22" name="TextBox 21"/>
+          <p:cNvSpPr txBox="1"/>
+          <p:nvPr/>
+        </p:nvSpPr>
+        <p:spPr>
+          <a:xfrm>
+            <a:off x="9222377" y="5815584"/>
+            <a:ext cx="731520" cy="164592"/>
+          </a:xfrm>
+          <a:prstGeom prst="rect">
+            <a:avLst/>
+          </a:prstGeom>
+          <a:noFill/>
+          <a:effectLst/>
+        </p:spPr>
+        <p:txBody>
+          <a:bodyPr wrap="square" lIns="0" rIns="0" tIns="0" bIns="0" anchor="t">
+            <a:spAutoFit/>
+          </a:bodyPr>
+          <a:lstStyle/>
+          <a:p>
+            <a:pPr algn="ctr"/>
+            <a:r>
+              <a:rPr sz="800" b="0" i="0">
+                <a:solidFill>
+                  <a:srgbClr val="222222"/>
+                </a:solidFill>
+                <a:latin typeface="Arial"/>
+              </a:rPr>
+              <a:t>4</a:t>
+            </a:r>
+          </a:p>
+        </p:txBody>
+      </p:sp>
+      <p:cxnSp>
+        <p:nvCxnSpPr>
+          <p:cNvPr id="23" name="Connector 22"/>
+          <p:cNvCxnSpPr/>
+          <p:nvPr/>
+        </p:nvCxnSpPr>
+        <p:spPr>
+          <a:xfrm>
+            <a:off x="10698480" y="5760720"/>
+            <a:ext cx="0" cy="64008"/>
+          </a:xfrm>
+          <a:prstGeom prst="line">
+            <a:avLst/>
+          </a:prstGeom>
+          <a:ln w="9525">
+            <a:solidFill>
+              <a:srgbClr val="222222"/>
+            </a:solidFill>
+          </a:ln>
+          <a:effectLst/>
+        </p:spPr>
+        <p:style>
+          <a:lnRef idx="2">
+            <a:schemeClr val="accent1"/>
+          </a:lnRef>
+          <a:fillRef idx="0">
+            <a:schemeClr val="accent1"/>
+          </a:fillRef>
+          <a:effectRef idx="1">
+            <a:schemeClr val="accent1"/>
+          </a:effectRef>
+          <a:fontRef idx="minor">
+            <a:schemeClr val="tx1"/>
+          </a:fontRef>
+        </p:style>
+      </p:cxnSp>
+      <p:sp>
+        <p:nvSpPr>
+          <p:cNvPr id="24" name="TextBox 23"/>
+          <p:cNvSpPr txBox="1"/>
+          <p:nvPr/>
+        </p:nvSpPr>
+        <p:spPr>
+          <a:xfrm>
+            <a:off x="10332720" y="5815584"/>
+            <a:ext cx="731520" cy="164592"/>
+          </a:xfrm>
+          <a:prstGeom prst="rect">
+            <a:avLst/>
+          </a:prstGeom>
+          <a:noFill/>
+          <a:effectLst/>
+        </p:spPr>
+        <p:txBody>
+          <a:bodyPr wrap="square" lIns="0" rIns="0" tIns="0" bIns="0" anchor="t">
+            <a:spAutoFit/>
+          </a:bodyPr>
+          <a:lstStyle/>
+          <a:p>
+            <a:pPr algn="ctr"/>
+            <a:r>
+              <a:rPr sz="800" b="0" i="0">
+                <a:solidFill>
+                  <a:srgbClr val="222222"/>
+                </a:solidFill>
+                <a:latin typeface="Arial"/>
+              </a:rPr>
+              <a:t>5</a:t>
+            </a:r>
+          </a:p>
+        </p:txBody>
+      </p:sp>
+      <p:sp>
+        <p:nvSpPr>
+          <p:cNvPr id="25" name="TextBox 24"/>
+          <p:cNvSpPr txBox="1"/>
+          <p:nvPr/>
+        </p:nvSpPr>
+        <p:spPr>
+          <a:xfrm>
+            <a:off x="2926080" y="6108192"/>
+            <a:ext cx="7772400" cy="228600"/>
+          </a:xfrm>
+          <a:prstGeom prst="rect">
+            <a:avLst/>
+          </a:prstGeom>
+          <a:noFill/>
+          <a:effectLst/>
+        </p:spPr>
+        <p:txBody>
+          <a:bodyPr wrap="square" lIns="0" rIns="0" tIns="0" bIns="0" anchor="t">
+            <a:spAutoFit/>
+          </a:bodyPr>
+          <a:lstStyle/>
+          <a:p>
+            <a:pPr algn="ctr"/>
+            <a:r>
+              <a:rPr sz="900" b="1" i="0">
+                <a:solidFill>
+                  <a:srgbClr val="222222"/>
+                </a:solidFill>
+                <a:latin typeface="Arial"/>
+              </a:rPr>
+              <a:t>Stouffer Z (primary = solid diamond; 5-cohort-only comparison = hollow)</a:t>
+            </a:r>
+          </a:p>
+        </p:txBody>
+      </p:sp>
+      <p:cxnSp>
+        <p:nvCxnSpPr>
           <p:cNvPr id="26" name="Connector 25"/>
           <p:cNvCxnSpPr/>
           <p:nvPr/>
         </p:nvCxnSpPr>
         <p:spPr>
           <a:xfrm>
-            <a:off x="3244814" y="1188720"/>
+            <a:off x="5146766" y="1188720"/>
             <a:ext cx="0" cy="4572000"/>
           </a:xfrm>
           <a:prstGeom prst="line">
             <a:avLst/>
           </a:prstGeom>
-          <a:ln w="6350">
+          <a:ln w="15240">
             <a:solidFill>
-              <a:srgbClr val="BBBBBB"/>
+              <a:srgbClr val="222222"/>
             </a:solidFill>
-            <a:prstDash val="dash"/>
           </a:ln>
           <a:effectLst/>
         </p:spPr>
@@ -3998,7 +4005,7 @@
         </p:nvCxnSpPr>
         <p:spPr>
           <a:xfrm>
-            <a:off x="7597358" y="1188720"/>
+            <a:off x="2970494" y="1188720"/>
             <a:ext cx="0" cy="4572000"/>
           </a:xfrm>
           <a:prstGeom prst="line">
@@ -4027,765 +4034,23 @@
           </a:fontRef>
         </p:style>
       </p:cxnSp>
-      <p:sp>
-        <p:nvSpPr>
-          <p:cNvPr id="28" name="TextBox 27"/>
-          <p:cNvSpPr txBox="1"/>
-          <p:nvPr/>
-        </p:nvSpPr>
-        <p:spPr>
-          <a:xfrm>
-            <a:off x="182880" y="1423851"/>
-            <a:ext cx="2926080" cy="182880"/>
-          </a:xfrm>
-          <a:prstGeom prst="rect">
-            <a:avLst/>
-          </a:prstGeom>
-          <a:noFill/>
-          <a:effectLst/>
-        </p:spPr>
-        <p:txBody>
-          <a:bodyPr wrap="square" lIns="0" rIns="0" tIns="0" bIns="0" anchor="ctr">
-            <a:spAutoFit/>
-          </a:bodyPr>
-          <a:lstStyle/>
-          <a:p>
-            <a:pPr algn="r"/>
-            <a:r>
-              <a:rPr sz="900" b="1" i="0">
-                <a:solidFill>
-                  <a:srgbClr val="0E4A68"/>
-                </a:solidFill>
-                <a:latin typeface="Arial"/>
-              </a:rPr>
-              <a:t>DSB / HDR</a:t>
-            </a:r>
-          </a:p>
-        </p:txBody>
-      </p:sp>
-      <p:sp>
-        <p:nvSpPr>
-          <p:cNvPr id="29" name="Diamond 28"/>
-          <p:cNvSpPr/>
-          <p:nvPr/>
-        </p:nvSpPr>
-        <p:spPr>
-          <a:xfrm>
-            <a:off x="8831145" y="1405563"/>
-            <a:ext cx="219456" cy="219456"/>
-          </a:xfrm>
-          <a:prstGeom prst="diamond">
-            <a:avLst/>
-          </a:prstGeom>
-          <a:solidFill>
-            <a:srgbClr val="0E4A68"/>
-          </a:solidFill>
-          <a:ln w="7620">
-            <a:solidFill>
-              <a:srgbClr val="222222"/>
-            </a:solidFill>
-          </a:ln>
-          <a:effectLst/>
-        </p:spPr>
-        <p:style>
-          <a:lnRef idx="1">
-            <a:schemeClr val="accent1"/>
-          </a:lnRef>
-          <a:fillRef idx="3">
-            <a:schemeClr val="accent1"/>
-          </a:fillRef>
-          <a:effectRef idx="2">
-            <a:schemeClr val="accent1"/>
-          </a:effectRef>
-          <a:fontRef idx="minor">
-            <a:schemeClr val="lt1"/>
-          </a:fontRef>
-        </p:style>
-        <p:txBody>
-          <a:bodyPr rtlCol="0" anchor="ctr"/>
-          <a:lstStyle/>
-          <a:p>
-            <a:pPr algn="ctr"/>
-          </a:p>
-        </p:txBody>
-      </p:sp>
-      <p:sp>
-        <p:nvSpPr>
-          <p:cNvPr id="30" name="TextBox 29"/>
-          <p:cNvSpPr txBox="1"/>
-          <p:nvPr/>
-        </p:nvSpPr>
-        <p:spPr>
-          <a:xfrm>
-            <a:off x="11064240" y="1423851"/>
-            <a:ext cx="1188720" cy="182880"/>
-          </a:xfrm>
-          <a:prstGeom prst="rect">
-            <a:avLst/>
-          </a:prstGeom>
-          <a:noFill/>
-          <a:effectLst/>
-        </p:spPr>
-        <p:txBody>
-          <a:bodyPr wrap="square" lIns="0" rIns="0" tIns="0" bIns="0" anchor="ctr">
-            <a:spAutoFit/>
-          </a:bodyPr>
-          <a:lstStyle/>
-          <a:p>
-            <a:pPr algn="l"/>
-            <a:r>
-              <a:rPr sz="800" b="1" i="0">
-                <a:solidFill>
-                  <a:srgbClr val="D4A300"/>
-                </a:solidFill>
-                <a:latin typeface="Arial"/>
-              </a:rPr>
-              <a:t>P = 0.002</a:t>
-            </a:r>
-          </a:p>
-        </p:txBody>
-      </p:sp>
-      <p:sp>
-        <p:nvSpPr>
-          <p:cNvPr id="31" name="TextBox 30"/>
-          <p:cNvSpPr txBox="1"/>
-          <p:nvPr/>
-        </p:nvSpPr>
-        <p:spPr>
-          <a:xfrm>
-            <a:off x="12298680" y="1423851"/>
-            <a:ext cx="822960" cy="182880"/>
-          </a:xfrm>
-          <a:prstGeom prst="rect">
-            <a:avLst/>
-          </a:prstGeom>
-          <a:noFill/>
-          <a:effectLst/>
-        </p:spPr>
-        <p:txBody>
-          <a:bodyPr wrap="square" lIns="0" rIns="0" tIns="0" bIns="0" anchor="ctr">
-            <a:spAutoFit/>
-          </a:bodyPr>
-          <a:lstStyle/>
-          <a:p>
-            <a:pPr algn="l"/>
-            <a:r>
-              <a:rPr sz="800" b="0" i="0">
-                <a:solidFill>
-                  <a:srgbClr val="BBBBBB"/>
-                </a:solidFill>
-                <a:latin typeface="Arial"/>
-              </a:rPr>
-              <a:t>N=518</a:t>
-            </a:r>
-          </a:p>
-        </p:txBody>
-      </p:sp>
-      <p:sp>
-        <p:nvSpPr>
-          <p:cNvPr id="32" name="TextBox 31"/>
-          <p:cNvSpPr txBox="1"/>
-          <p:nvPr/>
-        </p:nvSpPr>
-        <p:spPr>
-          <a:xfrm>
-            <a:off x="182880" y="2076994"/>
-            <a:ext cx="2926080" cy="182880"/>
-          </a:xfrm>
-          <a:prstGeom prst="rect">
-            <a:avLst/>
-          </a:prstGeom>
-          <a:noFill/>
-          <a:effectLst/>
-        </p:spPr>
-        <p:txBody>
-          <a:bodyPr wrap="square" lIns="0" rIns="0" tIns="0" bIns="0" anchor="ctr">
-            <a:spAutoFit/>
-          </a:bodyPr>
-          <a:lstStyle/>
-          <a:p>
-            <a:pPr algn="r"/>
-            <a:r>
-              <a:rPr sz="900" b="1" i="0">
-                <a:solidFill>
-                  <a:srgbClr val="0E4A68"/>
-                </a:solidFill>
-                <a:latin typeface="Arial"/>
-              </a:rPr>
-              <a:t>E2F/MYC</a:t>
-            </a:r>
-          </a:p>
-        </p:txBody>
-      </p:sp>
-      <p:sp>
-        <p:nvSpPr>
-          <p:cNvPr id="33" name="Diamond 32"/>
-          <p:cNvSpPr/>
-          <p:nvPr/>
-        </p:nvSpPr>
-        <p:spPr>
-          <a:xfrm>
-            <a:off x="8409214" y="2058706"/>
-            <a:ext cx="219456" cy="219456"/>
-          </a:xfrm>
-          <a:prstGeom prst="diamond">
-            <a:avLst/>
-          </a:prstGeom>
-          <a:solidFill>
-            <a:srgbClr val="0E4A68"/>
-          </a:solidFill>
-          <a:ln w="7620">
-            <a:solidFill>
-              <a:srgbClr val="222222"/>
-            </a:solidFill>
-          </a:ln>
-          <a:effectLst/>
-        </p:spPr>
-        <p:style>
-          <a:lnRef idx="1">
-            <a:schemeClr val="accent1"/>
-          </a:lnRef>
-          <a:fillRef idx="3">
-            <a:schemeClr val="accent1"/>
-          </a:fillRef>
-          <a:effectRef idx="2">
-            <a:schemeClr val="accent1"/>
-          </a:effectRef>
-          <a:fontRef idx="minor">
-            <a:schemeClr val="lt1"/>
-          </a:fontRef>
-        </p:style>
-        <p:txBody>
-          <a:bodyPr rtlCol="0" anchor="ctr"/>
-          <a:lstStyle/>
-          <a:p>
-            <a:pPr algn="ctr"/>
-          </a:p>
-        </p:txBody>
-      </p:sp>
-      <p:sp>
-        <p:nvSpPr>
-          <p:cNvPr id="34" name="TextBox 33"/>
-          <p:cNvSpPr txBox="1"/>
-          <p:nvPr/>
-        </p:nvSpPr>
-        <p:spPr>
-          <a:xfrm>
-            <a:off x="11064240" y="2076994"/>
-            <a:ext cx="1188720" cy="182880"/>
-          </a:xfrm>
-          <a:prstGeom prst="rect">
-            <a:avLst/>
-          </a:prstGeom>
-          <a:noFill/>
-          <a:effectLst/>
-        </p:spPr>
-        <p:txBody>
-          <a:bodyPr wrap="square" lIns="0" rIns="0" tIns="0" bIns="0" anchor="ctr">
-            <a:spAutoFit/>
-          </a:bodyPr>
-          <a:lstStyle/>
-          <a:p>
-            <a:pPr algn="l"/>
-            <a:r>
-              <a:rPr sz="800" b="1" i="0">
-                <a:solidFill>
-                  <a:srgbClr val="D4A300"/>
-                </a:solidFill>
-                <a:latin typeface="Arial"/>
-              </a:rPr>
-              <a:t>P = 0.005</a:t>
-            </a:r>
-          </a:p>
-        </p:txBody>
-      </p:sp>
-      <p:sp>
-        <p:nvSpPr>
-          <p:cNvPr id="35" name="TextBox 34"/>
-          <p:cNvSpPr txBox="1"/>
-          <p:nvPr/>
-        </p:nvSpPr>
-        <p:spPr>
-          <a:xfrm>
-            <a:off x="12298680" y="2076994"/>
-            <a:ext cx="822960" cy="182880"/>
-          </a:xfrm>
-          <a:prstGeom prst="rect">
-            <a:avLst/>
-          </a:prstGeom>
-          <a:noFill/>
-          <a:effectLst/>
-        </p:spPr>
-        <p:txBody>
-          <a:bodyPr wrap="square" lIns="0" rIns="0" tIns="0" bIns="0" anchor="ctr">
-            <a:spAutoFit/>
-          </a:bodyPr>
-          <a:lstStyle/>
-          <a:p>
-            <a:pPr algn="l"/>
-            <a:r>
-              <a:rPr sz="800" b="0" i="0">
-                <a:solidFill>
-                  <a:srgbClr val="BBBBBB"/>
-                </a:solidFill>
-                <a:latin typeface="Arial"/>
-              </a:rPr>
-              <a:t>N=518</a:t>
-            </a:r>
-          </a:p>
-        </p:txBody>
-      </p:sp>
-      <p:sp>
-        <p:nvSpPr>
-          <p:cNvPr id="36" name="TextBox 35"/>
-          <p:cNvSpPr txBox="1"/>
-          <p:nvPr/>
-        </p:nvSpPr>
-        <p:spPr>
-          <a:xfrm>
-            <a:off x="182880" y="2730137"/>
-            <a:ext cx="2926080" cy="182880"/>
-          </a:xfrm>
-          <a:prstGeom prst="rect">
-            <a:avLst/>
-          </a:prstGeom>
-          <a:noFill/>
-          <a:effectLst/>
-        </p:spPr>
-        <p:txBody>
-          <a:bodyPr wrap="square" lIns="0" rIns="0" tIns="0" bIns="0" anchor="ctr">
-            <a:spAutoFit/>
-          </a:bodyPr>
-          <a:lstStyle/>
-          <a:p>
-            <a:pPr algn="r"/>
-            <a:r>
-              <a:rPr sz="900" b="1" i="0">
-                <a:solidFill>
-                  <a:srgbClr val="0E4A68"/>
-                </a:solidFill>
-                <a:latin typeface="Arial"/>
-              </a:rPr>
-              <a:t>Tumor cell-cycle</a:t>
-            </a:r>
-          </a:p>
-        </p:txBody>
-      </p:sp>
-      <p:sp>
-        <p:nvSpPr>
-          <p:cNvPr id="37" name="Diamond 36"/>
-          <p:cNvSpPr/>
-          <p:nvPr/>
-        </p:nvSpPr>
-        <p:spPr>
-          <a:xfrm>
-            <a:off x="8875558" y="2711849"/>
-            <a:ext cx="219456" cy="219456"/>
-          </a:xfrm>
-          <a:prstGeom prst="diamond">
-            <a:avLst/>
-          </a:prstGeom>
-          <a:solidFill>
-            <a:srgbClr val="0E4A68"/>
-          </a:solidFill>
-          <a:ln w="7620">
-            <a:solidFill>
-              <a:srgbClr val="222222"/>
-            </a:solidFill>
-          </a:ln>
-          <a:effectLst/>
-        </p:spPr>
-        <p:style>
-          <a:lnRef idx="1">
-            <a:schemeClr val="accent1"/>
-          </a:lnRef>
-          <a:fillRef idx="3">
-            <a:schemeClr val="accent1"/>
-          </a:fillRef>
-          <a:effectRef idx="2">
-            <a:schemeClr val="accent1"/>
-          </a:effectRef>
-          <a:fontRef idx="minor">
-            <a:schemeClr val="lt1"/>
-          </a:fontRef>
-        </p:style>
-        <p:txBody>
-          <a:bodyPr rtlCol="0" anchor="ctr"/>
-          <a:lstStyle/>
-          <a:p>
-            <a:pPr algn="ctr"/>
-          </a:p>
-        </p:txBody>
-      </p:sp>
-      <p:sp>
-        <p:nvSpPr>
-          <p:cNvPr id="38" name="TextBox 37"/>
-          <p:cNvSpPr txBox="1"/>
-          <p:nvPr/>
-        </p:nvSpPr>
-        <p:spPr>
-          <a:xfrm>
-            <a:off x="11064240" y="2730137"/>
-            <a:ext cx="1188720" cy="182880"/>
-          </a:xfrm>
-          <a:prstGeom prst="rect">
-            <a:avLst/>
-          </a:prstGeom>
-          <a:noFill/>
-          <a:effectLst/>
-        </p:spPr>
-        <p:txBody>
-          <a:bodyPr wrap="square" lIns="0" rIns="0" tIns="0" bIns="0" anchor="ctr">
-            <a:spAutoFit/>
-          </a:bodyPr>
-          <a:lstStyle/>
-          <a:p>
-            <a:pPr algn="l"/>
-            <a:r>
-              <a:rPr sz="800" b="1" i="0">
-                <a:solidFill>
-                  <a:srgbClr val="D4A300"/>
-                </a:solidFill>
-                <a:latin typeface="Arial"/>
-              </a:rPr>
-              <a:t>P = 0.001</a:t>
-            </a:r>
-          </a:p>
-        </p:txBody>
-      </p:sp>
-      <p:sp>
-        <p:nvSpPr>
-          <p:cNvPr id="39" name="TextBox 38"/>
-          <p:cNvSpPr txBox="1"/>
-          <p:nvPr/>
-        </p:nvSpPr>
-        <p:spPr>
-          <a:xfrm>
-            <a:off x="12298680" y="2730137"/>
-            <a:ext cx="822960" cy="182880"/>
-          </a:xfrm>
-          <a:prstGeom prst="rect">
-            <a:avLst/>
-          </a:prstGeom>
-          <a:noFill/>
-          <a:effectLst/>
-        </p:spPr>
-        <p:txBody>
-          <a:bodyPr wrap="square" lIns="0" rIns="0" tIns="0" bIns="0" anchor="ctr">
-            <a:spAutoFit/>
-          </a:bodyPr>
-          <a:lstStyle/>
-          <a:p>
-            <a:pPr algn="l"/>
-            <a:r>
-              <a:rPr sz="800" b="0" i="0">
-                <a:solidFill>
-                  <a:srgbClr val="BBBBBB"/>
-                </a:solidFill>
-                <a:latin typeface="Arial"/>
-              </a:rPr>
-              <a:t>N=518</a:t>
-            </a:r>
-          </a:p>
-        </p:txBody>
-      </p:sp>
-      <p:sp>
-        <p:nvSpPr>
-          <p:cNvPr id="40" name="TextBox 39"/>
-          <p:cNvSpPr txBox="1"/>
-          <p:nvPr/>
-        </p:nvSpPr>
-        <p:spPr>
-          <a:xfrm>
-            <a:off x="182880" y="3383280"/>
-            <a:ext cx="2926080" cy="182880"/>
-          </a:xfrm>
-          <a:prstGeom prst="rect">
-            <a:avLst/>
-          </a:prstGeom>
-          <a:noFill/>
-          <a:effectLst/>
-        </p:spPr>
-        <p:txBody>
-          <a:bodyPr wrap="square" lIns="0" rIns="0" tIns="0" bIns="0" anchor="ctr">
-            <a:spAutoFit/>
-          </a:bodyPr>
-          <a:lstStyle/>
-          <a:p>
-            <a:pPr algn="r"/>
-            <a:r>
-              <a:rPr sz="900" b="1" i="0">
-                <a:solidFill>
-                  <a:srgbClr val="0E4A68"/>
-                </a:solidFill>
-                <a:latin typeface="Arial"/>
-              </a:rPr>
-              <a:t>EMT</a:t>
-            </a:r>
-          </a:p>
-        </p:txBody>
-      </p:sp>
-      <p:sp>
-        <p:nvSpPr>
-          <p:cNvPr id="41" name="Diamond 40"/>
-          <p:cNvSpPr/>
-          <p:nvPr/>
-        </p:nvSpPr>
-        <p:spPr>
-          <a:xfrm>
-            <a:off x="7099010" y="3364992"/>
-            <a:ext cx="219456" cy="219456"/>
-          </a:xfrm>
-          <a:prstGeom prst="diamond">
-            <a:avLst/>
-          </a:prstGeom>
-          <a:solidFill>
-            <a:srgbClr val="0E4A68"/>
-          </a:solidFill>
-          <a:ln w="7620">
-            <a:solidFill>
-              <a:srgbClr val="222222"/>
-            </a:solidFill>
-          </a:ln>
-          <a:effectLst/>
-        </p:spPr>
-        <p:style>
-          <a:lnRef idx="1">
-            <a:schemeClr val="accent1"/>
-          </a:lnRef>
-          <a:fillRef idx="3">
-            <a:schemeClr val="accent1"/>
-          </a:fillRef>
-          <a:effectRef idx="2">
-            <a:schemeClr val="accent1"/>
-          </a:effectRef>
-          <a:fontRef idx="minor">
-            <a:schemeClr val="lt1"/>
-          </a:fontRef>
-        </p:style>
-        <p:txBody>
-          <a:bodyPr rtlCol="0" anchor="ctr"/>
-          <a:lstStyle/>
-          <a:p>
-            <a:pPr algn="ctr"/>
-          </a:p>
-        </p:txBody>
-      </p:sp>
-      <p:sp>
-        <p:nvSpPr>
-          <p:cNvPr id="42" name="TextBox 41"/>
-          <p:cNvSpPr txBox="1"/>
-          <p:nvPr/>
-        </p:nvSpPr>
-        <p:spPr>
-          <a:xfrm>
-            <a:off x="11064240" y="3383280"/>
-            <a:ext cx="1188720" cy="182880"/>
-          </a:xfrm>
-          <a:prstGeom prst="rect">
-            <a:avLst/>
-          </a:prstGeom>
-          <a:noFill/>
-          <a:effectLst/>
-        </p:spPr>
-        <p:txBody>
-          <a:bodyPr wrap="square" lIns="0" rIns="0" tIns="0" bIns="0" anchor="ctr">
-            <a:spAutoFit/>
-          </a:bodyPr>
-          <a:lstStyle/>
-          <a:p>
-            <a:pPr algn="l"/>
-            <a:r>
-              <a:rPr sz="800" b="0" i="0">
-                <a:solidFill>
-                  <a:srgbClr val="222222"/>
-                </a:solidFill>
-                <a:latin typeface="Arial"/>
-              </a:rPr>
-              <a:t>P = 0.106</a:t>
-            </a:r>
-          </a:p>
-        </p:txBody>
-      </p:sp>
-      <p:sp>
-        <p:nvSpPr>
-          <p:cNvPr id="43" name="TextBox 42"/>
-          <p:cNvSpPr txBox="1"/>
-          <p:nvPr/>
-        </p:nvSpPr>
-        <p:spPr>
-          <a:xfrm>
-            <a:off x="12298680" y="3383280"/>
-            <a:ext cx="822960" cy="182880"/>
-          </a:xfrm>
-          <a:prstGeom prst="rect">
-            <a:avLst/>
-          </a:prstGeom>
-          <a:noFill/>
-          <a:effectLst/>
-        </p:spPr>
-        <p:txBody>
-          <a:bodyPr wrap="square" lIns="0" rIns="0" tIns="0" bIns="0" anchor="ctr">
-            <a:spAutoFit/>
-          </a:bodyPr>
-          <a:lstStyle/>
-          <a:p>
-            <a:pPr algn="l"/>
-            <a:r>
-              <a:rPr sz="800" b="0" i="0">
-                <a:solidFill>
-                  <a:srgbClr val="BBBBBB"/>
-                </a:solidFill>
-                <a:latin typeface="Arial"/>
-              </a:rPr>
-              <a:t>N=518</a:t>
-            </a:r>
-          </a:p>
-        </p:txBody>
-      </p:sp>
-      <p:sp>
-        <p:nvSpPr>
-          <p:cNvPr id="44" name="TextBox 43"/>
-          <p:cNvSpPr txBox="1"/>
-          <p:nvPr/>
-        </p:nvSpPr>
-        <p:spPr>
-          <a:xfrm>
-            <a:off x="182880" y="4036423"/>
-            <a:ext cx="2926080" cy="182880"/>
-          </a:xfrm>
-          <a:prstGeom prst="rect">
-            <a:avLst/>
-          </a:prstGeom>
-          <a:noFill/>
-          <a:effectLst/>
-        </p:spPr>
-        <p:txBody>
-          <a:bodyPr wrap="square" lIns="0" rIns="0" tIns="0" bIns="0" anchor="ctr">
-            <a:spAutoFit/>
-          </a:bodyPr>
-          <a:lstStyle/>
-          <a:p>
-            <a:pPr algn="r"/>
-            <a:r>
-              <a:rPr sz="900" b="1" i="0">
-                <a:solidFill>
-                  <a:srgbClr val="8A2B4C"/>
-                </a:solidFill>
-                <a:latin typeface="Arial"/>
-              </a:rPr>
-              <a:t>CD8 cytotoxic</a:t>
-            </a:r>
-          </a:p>
-        </p:txBody>
-      </p:sp>
-      <p:sp>
-        <p:nvSpPr>
-          <p:cNvPr id="45" name="Diamond 44"/>
-          <p:cNvSpPr/>
-          <p:nvPr/>
-        </p:nvSpPr>
-        <p:spPr>
-          <a:xfrm>
-            <a:off x="8964386" y="4018135"/>
-            <a:ext cx="219456" cy="219456"/>
-          </a:xfrm>
-          <a:prstGeom prst="diamond">
-            <a:avLst/>
-          </a:prstGeom>
-          <a:solidFill>
-            <a:srgbClr val="8A2B4C"/>
-          </a:solidFill>
-          <a:ln w="7620">
-            <a:solidFill>
-              <a:srgbClr val="222222"/>
-            </a:solidFill>
-          </a:ln>
-          <a:effectLst/>
-        </p:spPr>
-        <p:style>
-          <a:lnRef idx="1">
-            <a:schemeClr val="accent1"/>
-          </a:lnRef>
-          <a:fillRef idx="3">
-            <a:schemeClr val="accent1"/>
-          </a:fillRef>
-          <a:effectRef idx="2">
-            <a:schemeClr val="accent1"/>
-          </a:effectRef>
-          <a:fontRef idx="minor">
-            <a:schemeClr val="lt1"/>
-          </a:fontRef>
-        </p:style>
-        <p:txBody>
-          <a:bodyPr rtlCol="0" anchor="ctr"/>
-          <a:lstStyle/>
-          <a:p>
-            <a:pPr algn="ctr"/>
-          </a:p>
-        </p:txBody>
-      </p:sp>
-      <p:sp>
-        <p:nvSpPr>
-          <p:cNvPr id="46" name="Diamond 45"/>
-          <p:cNvSpPr/>
-          <p:nvPr/>
-        </p:nvSpPr>
-        <p:spPr>
-          <a:xfrm>
-            <a:off x="7550331" y="4036423"/>
-            <a:ext cx="182880" cy="182880"/>
-          </a:xfrm>
-          <a:prstGeom prst="diamond">
-            <a:avLst/>
-          </a:prstGeom>
-          <a:noFill/>
-          <a:ln w="15240">
-            <a:solidFill>
-              <a:srgbClr val="8A2B4C"/>
-            </a:solidFill>
-          </a:ln>
-          <a:effectLst/>
-        </p:spPr>
-        <p:style>
-          <a:lnRef idx="1">
-            <a:schemeClr val="accent1"/>
-          </a:lnRef>
-          <a:fillRef idx="3">
-            <a:schemeClr val="accent1"/>
-          </a:fillRef>
-          <a:effectRef idx="2">
-            <a:schemeClr val="accent1"/>
-          </a:effectRef>
-          <a:fontRef idx="minor">
-            <a:schemeClr val="lt1"/>
-          </a:fontRef>
-        </p:style>
-        <p:txBody>
-          <a:bodyPr rtlCol="0" anchor="ctr"/>
-          <a:lstStyle/>
-          <a:p>
-            <a:pPr algn="ctr"/>
-          </a:p>
-        </p:txBody>
-      </p:sp>
       <p:cxnSp>
         <p:nvCxnSpPr>
-          <p:cNvPr id="47" name="Connector 46"/>
+          <p:cNvPr id="28" name="Connector 27"/>
           <p:cNvCxnSpPr/>
           <p:nvPr/>
         </p:nvCxnSpPr>
         <p:spPr>
-          <a:xfrm flipH="1">
-            <a:off x="7641771" y="4127863"/>
-            <a:ext cx="1432343" cy="0"/>
+          <a:xfrm>
+            <a:off x="7323038" y="1188720"/>
+            <a:ext cx="0" cy="4572000"/>
           </a:xfrm>
           <a:prstGeom prst="line">
             <a:avLst/>
           </a:prstGeom>
           <a:ln w="6350">
             <a:solidFill>
-              <a:srgbClr val="8A2B4C"/>
+              <a:srgbClr val="BBBBBB"/>
             </a:solidFill>
             <a:prstDash val="dash"/>
           </a:ln>
@@ -4808,14 +4073,14 @@
       </p:cxnSp>
       <p:sp>
         <p:nvSpPr>
-          <p:cNvPr id="48" name="TextBox 47"/>
+          <p:cNvPr id="29" name="TextBox 28"/>
           <p:cNvSpPr txBox="1"/>
           <p:nvPr/>
         </p:nvSpPr>
         <p:spPr>
           <a:xfrm>
-            <a:off x="11064240" y="4036423"/>
-            <a:ext cx="1188720" cy="182880"/>
+            <a:off x="182880" y="1423851"/>
+            <a:ext cx="2651760" cy="182880"/>
           </a:xfrm>
           <a:prstGeom prst="rect">
             <a:avLst/>
@@ -4829,109 +4094,37 @@
           </a:bodyPr>
           <a:lstStyle/>
           <a:p>
-            <a:pPr algn="l"/>
-            <a:r>
-              <a:rPr sz="800" b="1" i="0">
-                <a:solidFill>
-                  <a:srgbClr val="D4A300"/>
+            <a:pPr algn="r"/>
+            <a:r>
+              <a:rPr sz="900" b="1" i="0">
+                <a:solidFill>
+                  <a:srgbClr val="0E4A68"/>
                 </a:solidFill>
                 <a:latin typeface="Arial"/>
               </a:rPr>
-              <a:t>P = 0.001</a:t>
-            </a:r>
-          </a:p>
-        </p:txBody>
-      </p:sp>
-      <p:sp>
-        <p:nvSpPr>
-          <p:cNvPr id="49" name="TextBox 48"/>
-          <p:cNvSpPr txBox="1"/>
-          <p:nvPr/>
-        </p:nvSpPr>
-        <p:spPr>
-          <a:xfrm>
-            <a:off x="12298680" y="4036423"/>
-            <a:ext cx="822960" cy="182880"/>
-          </a:xfrm>
-          <a:prstGeom prst="rect">
-            <a:avLst/>
-          </a:prstGeom>
-          <a:noFill/>
-          <a:effectLst/>
-        </p:spPr>
-        <p:txBody>
-          <a:bodyPr wrap="square" lIns="0" rIns="0" tIns="0" bIns="0" anchor="ctr">
-            <a:spAutoFit/>
-          </a:bodyPr>
-          <a:lstStyle/>
-          <a:p>
-            <a:pPr algn="l"/>
-            <a:r>
-              <a:rPr sz="800" b="0" i="0">
-                <a:solidFill>
-                  <a:srgbClr val="BBBBBB"/>
-                </a:solidFill>
-                <a:latin typeface="Arial"/>
-              </a:rPr>
-              <a:t>N=816</a:t>
-            </a:r>
-          </a:p>
-        </p:txBody>
-      </p:sp>
-      <p:sp>
-        <p:nvSpPr>
-          <p:cNvPr id="50" name="TextBox 49"/>
-          <p:cNvSpPr txBox="1"/>
-          <p:nvPr/>
-        </p:nvSpPr>
-        <p:spPr>
-          <a:xfrm>
-            <a:off x="182880" y="4689566"/>
-            <a:ext cx="2926080" cy="182880"/>
-          </a:xfrm>
-          <a:prstGeom prst="rect">
-            <a:avLst/>
-          </a:prstGeom>
-          <a:noFill/>
-          <a:effectLst/>
-        </p:spPr>
-        <p:txBody>
-          <a:bodyPr wrap="square" lIns="0" rIns="0" tIns="0" bIns="0" anchor="ctr">
-            <a:spAutoFit/>
-          </a:bodyPr>
-          <a:lstStyle/>
-          <a:p>
-            <a:pPr algn="r"/>
-            <a:r>
-              <a:rPr sz="900" b="1" i="0">
-                <a:solidFill>
-                  <a:srgbClr val="8A2B4C"/>
-                </a:solidFill>
-                <a:latin typeface="Arial"/>
-              </a:rPr>
-              <a:t>T-cell infiltration</a:t>
-            </a:r>
-          </a:p>
-        </p:txBody>
-      </p:sp>
-      <p:sp>
-        <p:nvSpPr>
-          <p:cNvPr id="51" name="Diamond 50"/>
+              <a:t>DSB / HDR</a:t>
+            </a:r>
+          </a:p>
+        </p:txBody>
+      </p:sp>
+      <p:sp>
+        <p:nvSpPr>
+          <p:cNvPr id="30" name="Diamond 29"/>
           <p:cNvSpPr/>
           <p:nvPr/>
         </p:nvSpPr>
         <p:spPr>
           <a:xfrm>
-            <a:off x="6244046" y="4671278"/>
-            <a:ext cx="219456" cy="219456"/>
+            <a:off x="8547681" y="1396419"/>
+            <a:ext cx="237744" cy="237744"/>
           </a:xfrm>
           <a:prstGeom prst="diamond">
             <a:avLst/>
           </a:prstGeom>
           <a:solidFill>
-            <a:srgbClr val="8A2B4C"/>
+            <a:srgbClr val="0E4A68"/>
           </a:solidFill>
-          <a:ln w="7620">
+          <a:ln w="8890">
             <a:solidFill>
               <a:srgbClr val="222222"/>
             </a:solidFill>
@@ -4962,13 +4155,13 @@
       </p:sp>
       <p:sp>
         <p:nvSpPr>
-          <p:cNvPr id="52" name="TextBox 51"/>
+          <p:cNvPr id="31" name="TextBox 30"/>
           <p:cNvSpPr txBox="1"/>
           <p:nvPr/>
         </p:nvSpPr>
         <p:spPr>
           <a:xfrm>
-            <a:off x="11064240" y="4689566"/>
+            <a:off x="10789920" y="1423851"/>
             <a:ext cx="1188720" cy="182880"/>
           </a:xfrm>
           <a:prstGeom prst="rect">
@@ -4985,26 +4178,26 @@
           <a:p>
             <a:pPr algn="l"/>
             <a:r>
-              <a:rPr sz="800" b="0" i="0">
-                <a:solidFill>
-                  <a:srgbClr val="222222"/>
+              <a:rPr sz="800" b="1" i="0">
+                <a:solidFill>
+                  <a:srgbClr val="D4A300"/>
                 </a:solidFill>
                 <a:latin typeface="Arial"/>
               </a:rPr>
-              <a:t>P = 0.399</a:t>
-            </a:r>
-          </a:p>
-        </p:txBody>
-      </p:sp>
-      <p:sp>
-        <p:nvSpPr>
-          <p:cNvPr id="53" name="TextBox 52"/>
+              <a:t>P = 0.002</a:t>
+            </a:r>
+          </a:p>
+        </p:txBody>
+      </p:sp>
+      <p:sp>
+        <p:nvSpPr>
+          <p:cNvPr id="32" name="TextBox 31"/>
           <p:cNvSpPr txBox="1"/>
           <p:nvPr/>
         </p:nvSpPr>
         <p:spPr>
           <a:xfrm>
-            <a:off x="12298680" y="4689566"/>
+            <a:off x="12024360" y="1423851"/>
             <a:ext cx="822960" cy="182880"/>
           </a:xfrm>
           <a:prstGeom prst="rect">
@@ -5034,14 +4227,14 @@
       </p:sp>
       <p:sp>
         <p:nvSpPr>
-          <p:cNvPr id="54" name="TextBox 53"/>
+          <p:cNvPr id="33" name="TextBox 32"/>
           <p:cNvSpPr txBox="1"/>
           <p:nvPr/>
         </p:nvSpPr>
         <p:spPr>
           <a:xfrm>
-            <a:off x="182880" y="5342709"/>
-            <a:ext cx="2926080" cy="182880"/>
+            <a:off x="182880" y="2076994"/>
+            <a:ext cx="2651760" cy="182880"/>
           </a:xfrm>
           <a:prstGeom prst="rect">
             <a:avLst/>
@@ -5059,33 +4252,33 @@
             <a:r>
               <a:rPr sz="900" b="1" i="0">
                 <a:solidFill>
-                  <a:srgbClr val="8A2B4C"/>
+                  <a:srgbClr val="0E4A68"/>
                 </a:solidFill>
                 <a:latin typeface="Arial"/>
               </a:rPr>
-              <a:t>B-cell infiltration</a:t>
-            </a:r>
-          </a:p>
-        </p:txBody>
-      </p:sp>
-      <p:sp>
-        <p:nvSpPr>
-          <p:cNvPr id="55" name="Diamond 54"/>
+              <a:t>E2F/MYC</a:t>
+            </a:r>
+          </a:p>
+        </p:txBody>
+      </p:sp>
+      <p:sp>
+        <p:nvSpPr>
+          <p:cNvPr id="34" name="Diamond 33"/>
           <p:cNvSpPr/>
           <p:nvPr/>
         </p:nvSpPr>
         <p:spPr>
           <a:xfrm>
-            <a:off x="5622254" y="5324421"/>
-            <a:ext cx="219456" cy="219456"/>
+            <a:off x="8125750" y="2049562"/>
+            <a:ext cx="237744" cy="237744"/>
           </a:xfrm>
           <a:prstGeom prst="diamond">
             <a:avLst/>
           </a:prstGeom>
           <a:solidFill>
-            <a:srgbClr val="8A2B4C"/>
+            <a:srgbClr val="0E4A68"/>
           </a:solidFill>
-          <a:ln w="7620">
+          <a:ln w="8890">
             <a:solidFill>
               <a:srgbClr val="222222"/>
             </a:solidFill>
@@ -5116,13 +4309,13 @@
       </p:sp>
       <p:sp>
         <p:nvSpPr>
-          <p:cNvPr id="56" name="TextBox 55"/>
+          <p:cNvPr id="35" name="TextBox 34"/>
           <p:cNvSpPr txBox="1"/>
           <p:nvPr/>
         </p:nvSpPr>
         <p:spPr>
           <a:xfrm>
-            <a:off x="11064240" y="5342709"/>
+            <a:off x="10789920" y="2076994"/>
             <a:ext cx="1188720" cy="182880"/>
           </a:xfrm>
           <a:prstGeom prst="rect">
@@ -5139,6 +4332,857 @@
           <a:p>
             <a:pPr algn="l"/>
             <a:r>
+              <a:rPr sz="800" b="1" i="0">
+                <a:solidFill>
+                  <a:srgbClr val="D4A300"/>
+                </a:solidFill>
+                <a:latin typeface="Arial"/>
+              </a:rPr>
+              <a:t>P = 0.005</a:t>
+            </a:r>
+          </a:p>
+        </p:txBody>
+      </p:sp>
+      <p:sp>
+        <p:nvSpPr>
+          <p:cNvPr id="36" name="TextBox 35"/>
+          <p:cNvSpPr txBox="1"/>
+          <p:nvPr/>
+        </p:nvSpPr>
+        <p:spPr>
+          <a:xfrm>
+            <a:off x="12024360" y="2076994"/>
+            <a:ext cx="822960" cy="182880"/>
+          </a:xfrm>
+          <a:prstGeom prst="rect">
+            <a:avLst/>
+          </a:prstGeom>
+          <a:noFill/>
+          <a:effectLst/>
+        </p:spPr>
+        <p:txBody>
+          <a:bodyPr wrap="square" lIns="0" rIns="0" tIns="0" bIns="0" anchor="ctr">
+            <a:spAutoFit/>
+          </a:bodyPr>
+          <a:lstStyle/>
+          <a:p>
+            <a:pPr algn="l"/>
+            <a:r>
+              <a:rPr sz="800" b="0" i="0">
+                <a:solidFill>
+                  <a:srgbClr val="BBBBBB"/>
+                </a:solidFill>
+                <a:latin typeface="Arial"/>
+              </a:rPr>
+              <a:t>N=518</a:t>
+            </a:r>
+          </a:p>
+        </p:txBody>
+      </p:sp>
+      <p:sp>
+        <p:nvSpPr>
+          <p:cNvPr id="37" name="TextBox 36"/>
+          <p:cNvSpPr txBox="1"/>
+          <p:nvPr/>
+        </p:nvSpPr>
+        <p:spPr>
+          <a:xfrm>
+            <a:off x="182880" y="2730137"/>
+            <a:ext cx="2651760" cy="182880"/>
+          </a:xfrm>
+          <a:prstGeom prst="rect">
+            <a:avLst/>
+          </a:prstGeom>
+          <a:noFill/>
+          <a:effectLst/>
+        </p:spPr>
+        <p:txBody>
+          <a:bodyPr wrap="square" lIns="0" rIns="0" tIns="0" bIns="0" anchor="ctr">
+            <a:spAutoFit/>
+          </a:bodyPr>
+          <a:lstStyle/>
+          <a:p>
+            <a:pPr algn="r"/>
+            <a:r>
+              <a:rPr sz="900" b="1" i="0">
+                <a:solidFill>
+                  <a:srgbClr val="0E4A68"/>
+                </a:solidFill>
+                <a:latin typeface="Arial"/>
+              </a:rPr>
+              <a:t>Tumor cell-cycle</a:t>
+            </a:r>
+          </a:p>
+        </p:txBody>
+      </p:sp>
+      <p:sp>
+        <p:nvSpPr>
+          <p:cNvPr id="38" name="Diamond 37"/>
+          <p:cNvSpPr/>
+          <p:nvPr/>
+        </p:nvSpPr>
+        <p:spPr>
+          <a:xfrm>
+            <a:off x="8592094" y="2702705"/>
+            <a:ext cx="237744" cy="237744"/>
+          </a:xfrm>
+          <a:prstGeom prst="diamond">
+            <a:avLst/>
+          </a:prstGeom>
+          <a:solidFill>
+            <a:srgbClr val="0E4A68"/>
+          </a:solidFill>
+          <a:ln w="8890">
+            <a:solidFill>
+              <a:srgbClr val="222222"/>
+            </a:solidFill>
+          </a:ln>
+          <a:effectLst/>
+        </p:spPr>
+        <p:style>
+          <a:lnRef idx="1">
+            <a:schemeClr val="accent1"/>
+          </a:lnRef>
+          <a:fillRef idx="3">
+            <a:schemeClr val="accent1"/>
+          </a:fillRef>
+          <a:effectRef idx="2">
+            <a:schemeClr val="accent1"/>
+          </a:effectRef>
+          <a:fontRef idx="minor">
+            <a:schemeClr val="lt1"/>
+          </a:fontRef>
+        </p:style>
+        <p:txBody>
+          <a:bodyPr rtlCol="0" anchor="ctr"/>
+          <a:lstStyle/>
+          <a:p>
+            <a:pPr algn="ctr"/>
+          </a:p>
+        </p:txBody>
+      </p:sp>
+      <p:sp>
+        <p:nvSpPr>
+          <p:cNvPr id="39" name="TextBox 38"/>
+          <p:cNvSpPr txBox="1"/>
+          <p:nvPr/>
+        </p:nvSpPr>
+        <p:spPr>
+          <a:xfrm>
+            <a:off x="10789920" y="2730137"/>
+            <a:ext cx="1188720" cy="182880"/>
+          </a:xfrm>
+          <a:prstGeom prst="rect">
+            <a:avLst/>
+          </a:prstGeom>
+          <a:noFill/>
+          <a:effectLst/>
+        </p:spPr>
+        <p:txBody>
+          <a:bodyPr wrap="square" lIns="0" rIns="0" tIns="0" bIns="0" anchor="ctr">
+            <a:spAutoFit/>
+          </a:bodyPr>
+          <a:lstStyle/>
+          <a:p>
+            <a:pPr algn="l"/>
+            <a:r>
+              <a:rPr sz="800" b="1" i="0">
+                <a:solidFill>
+                  <a:srgbClr val="D4A300"/>
+                </a:solidFill>
+                <a:latin typeface="Arial"/>
+              </a:rPr>
+              <a:t>P = 0.001</a:t>
+            </a:r>
+          </a:p>
+        </p:txBody>
+      </p:sp>
+      <p:sp>
+        <p:nvSpPr>
+          <p:cNvPr id="40" name="TextBox 39"/>
+          <p:cNvSpPr txBox="1"/>
+          <p:nvPr/>
+        </p:nvSpPr>
+        <p:spPr>
+          <a:xfrm>
+            <a:off x="12024360" y="2730137"/>
+            <a:ext cx="822960" cy="182880"/>
+          </a:xfrm>
+          <a:prstGeom prst="rect">
+            <a:avLst/>
+          </a:prstGeom>
+          <a:noFill/>
+          <a:effectLst/>
+        </p:spPr>
+        <p:txBody>
+          <a:bodyPr wrap="square" lIns="0" rIns="0" tIns="0" bIns="0" anchor="ctr">
+            <a:spAutoFit/>
+          </a:bodyPr>
+          <a:lstStyle/>
+          <a:p>
+            <a:pPr algn="l"/>
+            <a:r>
+              <a:rPr sz="800" b="0" i="0">
+                <a:solidFill>
+                  <a:srgbClr val="BBBBBB"/>
+                </a:solidFill>
+                <a:latin typeface="Arial"/>
+              </a:rPr>
+              <a:t>N=518</a:t>
+            </a:r>
+          </a:p>
+        </p:txBody>
+      </p:sp>
+      <p:sp>
+        <p:nvSpPr>
+          <p:cNvPr id="41" name="TextBox 40"/>
+          <p:cNvSpPr txBox="1"/>
+          <p:nvPr/>
+        </p:nvSpPr>
+        <p:spPr>
+          <a:xfrm>
+            <a:off x="182880" y="3383280"/>
+            <a:ext cx="2651760" cy="182880"/>
+          </a:xfrm>
+          <a:prstGeom prst="rect">
+            <a:avLst/>
+          </a:prstGeom>
+          <a:noFill/>
+          <a:effectLst/>
+        </p:spPr>
+        <p:txBody>
+          <a:bodyPr wrap="square" lIns="0" rIns="0" tIns="0" bIns="0" anchor="ctr">
+            <a:spAutoFit/>
+          </a:bodyPr>
+          <a:lstStyle/>
+          <a:p>
+            <a:pPr algn="r"/>
+            <a:r>
+              <a:rPr sz="900" b="1" i="0">
+                <a:solidFill>
+                  <a:srgbClr val="0E4A68"/>
+                </a:solidFill>
+                <a:latin typeface="Arial"/>
+              </a:rPr>
+              <a:t>EMT</a:t>
+            </a:r>
+          </a:p>
+        </p:txBody>
+      </p:sp>
+      <p:sp>
+        <p:nvSpPr>
+          <p:cNvPr id="42" name="Diamond 41"/>
+          <p:cNvSpPr/>
+          <p:nvPr/>
+        </p:nvSpPr>
+        <p:spPr>
+          <a:xfrm>
+            <a:off x="6815546" y="3355848"/>
+            <a:ext cx="237744" cy="237744"/>
+          </a:xfrm>
+          <a:prstGeom prst="diamond">
+            <a:avLst/>
+          </a:prstGeom>
+          <a:solidFill>
+            <a:srgbClr val="0E4A68"/>
+          </a:solidFill>
+          <a:ln w="8890">
+            <a:solidFill>
+              <a:srgbClr val="222222"/>
+            </a:solidFill>
+          </a:ln>
+          <a:effectLst/>
+        </p:spPr>
+        <p:style>
+          <a:lnRef idx="1">
+            <a:schemeClr val="accent1"/>
+          </a:lnRef>
+          <a:fillRef idx="3">
+            <a:schemeClr val="accent1"/>
+          </a:fillRef>
+          <a:effectRef idx="2">
+            <a:schemeClr val="accent1"/>
+          </a:effectRef>
+          <a:fontRef idx="minor">
+            <a:schemeClr val="lt1"/>
+          </a:fontRef>
+        </p:style>
+        <p:txBody>
+          <a:bodyPr rtlCol="0" anchor="ctr"/>
+          <a:lstStyle/>
+          <a:p>
+            <a:pPr algn="ctr"/>
+          </a:p>
+        </p:txBody>
+      </p:sp>
+      <p:sp>
+        <p:nvSpPr>
+          <p:cNvPr id="43" name="TextBox 42"/>
+          <p:cNvSpPr txBox="1"/>
+          <p:nvPr/>
+        </p:nvSpPr>
+        <p:spPr>
+          <a:xfrm>
+            <a:off x="10789920" y="3383280"/>
+            <a:ext cx="1188720" cy="182880"/>
+          </a:xfrm>
+          <a:prstGeom prst="rect">
+            <a:avLst/>
+          </a:prstGeom>
+          <a:noFill/>
+          <a:effectLst/>
+        </p:spPr>
+        <p:txBody>
+          <a:bodyPr wrap="square" lIns="0" rIns="0" tIns="0" bIns="0" anchor="ctr">
+            <a:spAutoFit/>
+          </a:bodyPr>
+          <a:lstStyle/>
+          <a:p>
+            <a:pPr algn="l"/>
+            <a:r>
+              <a:rPr sz="800" b="0" i="0">
+                <a:solidFill>
+                  <a:srgbClr val="222222"/>
+                </a:solidFill>
+                <a:latin typeface="Arial"/>
+              </a:rPr>
+              <a:t>P = 0.106</a:t>
+            </a:r>
+          </a:p>
+        </p:txBody>
+      </p:sp>
+      <p:sp>
+        <p:nvSpPr>
+          <p:cNvPr id="44" name="TextBox 43"/>
+          <p:cNvSpPr txBox="1"/>
+          <p:nvPr/>
+        </p:nvSpPr>
+        <p:spPr>
+          <a:xfrm>
+            <a:off x="12024360" y="3383280"/>
+            <a:ext cx="822960" cy="182880"/>
+          </a:xfrm>
+          <a:prstGeom prst="rect">
+            <a:avLst/>
+          </a:prstGeom>
+          <a:noFill/>
+          <a:effectLst/>
+        </p:spPr>
+        <p:txBody>
+          <a:bodyPr wrap="square" lIns="0" rIns="0" tIns="0" bIns="0" anchor="ctr">
+            <a:spAutoFit/>
+          </a:bodyPr>
+          <a:lstStyle/>
+          <a:p>
+            <a:pPr algn="l"/>
+            <a:r>
+              <a:rPr sz="800" b="0" i="0">
+                <a:solidFill>
+                  <a:srgbClr val="BBBBBB"/>
+                </a:solidFill>
+                <a:latin typeface="Arial"/>
+              </a:rPr>
+              <a:t>N=518</a:t>
+            </a:r>
+          </a:p>
+        </p:txBody>
+      </p:sp>
+      <p:sp>
+        <p:nvSpPr>
+          <p:cNvPr id="45" name="TextBox 44"/>
+          <p:cNvSpPr txBox="1"/>
+          <p:nvPr/>
+        </p:nvSpPr>
+        <p:spPr>
+          <a:xfrm>
+            <a:off x="182880" y="4036423"/>
+            <a:ext cx="2651760" cy="182880"/>
+          </a:xfrm>
+          <a:prstGeom prst="rect">
+            <a:avLst/>
+          </a:prstGeom>
+          <a:noFill/>
+          <a:effectLst/>
+        </p:spPr>
+        <p:txBody>
+          <a:bodyPr wrap="square" lIns="0" rIns="0" tIns="0" bIns="0" anchor="ctr">
+            <a:spAutoFit/>
+          </a:bodyPr>
+          <a:lstStyle/>
+          <a:p>
+            <a:pPr algn="r"/>
+            <a:r>
+              <a:rPr sz="900" b="1" i="0">
+                <a:solidFill>
+                  <a:srgbClr val="8A2B4C"/>
+                </a:solidFill>
+                <a:latin typeface="Arial"/>
+              </a:rPr>
+              <a:t>CD8 cytotoxic</a:t>
+            </a:r>
+          </a:p>
+        </p:txBody>
+      </p:sp>
+      <p:cxnSp>
+        <p:nvCxnSpPr>
+          <p:cNvPr id="46" name="Connector 45"/>
+          <p:cNvCxnSpPr/>
+          <p:nvPr/>
+        </p:nvCxnSpPr>
+        <p:spPr>
+          <a:xfrm flipH="1">
+            <a:off x="7367451" y="4127863"/>
+            <a:ext cx="1432343" cy="0"/>
+          </a:xfrm>
+          <a:prstGeom prst="line">
+            <a:avLst/>
+          </a:prstGeom>
+          <a:ln w="15240">
+            <a:solidFill>
+              <a:srgbClr val="8A2B4C"/>
+            </a:solidFill>
+            <a:prstDash val="dash"/>
+          </a:ln>
+          <a:effectLst/>
+        </p:spPr>
+        <p:style>
+          <a:lnRef idx="2">
+            <a:schemeClr val="accent1"/>
+          </a:lnRef>
+          <a:fillRef idx="0">
+            <a:schemeClr val="accent1"/>
+          </a:fillRef>
+          <a:effectRef idx="1">
+            <a:schemeClr val="accent1"/>
+          </a:effectRef>
+          <a:fontRef idx="minor">
+            <a:schemeClr val="tx1"/>
+          </a:fontRef>
+        </p:style>
+      </p:cxnSp>
+      <p:sp>
+        <p:nvSpPr>
+          <p:cNvPr id="47" name="Diamond 46"/>
+          <p:cNvSpPr/>
+          <p:nvPr/>
+        </p:nvSpPr>
+        <p:spPr>
+          <a:xfrm>
+            <a:off x="7276011" y="4036423"/>
+            <a:ext cx="182880" cy="182880"/>
+          </a:xfrm>
+          <a:prstGeom prst="diamond">
+            <a:avLst/>
+          </a:prstGeom>
+          <a:noFill/>
+          <a:ln w="19050">
+            <a:solidFill>
+              <a:srgbClr val="8A2B4C"/>
+            </a:solidFill>
+          </a:ln>
+          <a:effectLst/>
+        </p:spPr>
+        <p:style>
+          <a:lnRef idx="1">
+            <a:schemeClr val="accent1"/>
+          </a:lnRef>
+          <a:fillRef idx="3">
+            <a:schemeClr val="accent1"/>
+          </a:fillRef>
+          <a:effectRef idx="2">
+            <a:schemeClr val="accent1"/>
+          </a:effectRef>
+          <a:fontRef idx="minor">
+            <a:schemeClr val="lt1"/>
+          </a:fontRef>
+        </p:style>
+        <p:txBody>
+          <a:bodyPr rtlCol="0" anchor="ctr"/>
+          <a:lstStyle/>
+          <a:p>
+            <a:pPr algn="ctr"/>
+          </a:p>
+        </p:txBody>
+      </p:sp>
+      <p:sp>
+        <p:nvSpPr>
+          <p:cNvPr id="48" name="Diamond 47"/>
+          <p:cNvSpPr/>
+          <p:nvPr/>
+        </p:nvSpPr>
+        <p:spPr>
+          <a:xfrm>
+            <a:off x="8680922" y="4008991"/>
+            <a:ext cx="237744" cy="237744"/>
+          </a:xfrm>
+          <a:prstGeom prst="diamond">
+            <a:avLst/>
+          </a:prstGeom>
+          <a:solidFill>
+            <a:srgbClr val="8A2B4C"/>
+          </a:solidFill>
+          <a:ln w="8890">
+            <a:solidFill>
+              <a:srgbClr val="222222"/>
+            </a:solidFill>
+          </a:ln>
+          <a:effectLst/>
+        </p:spPr>
+        <p:style>
+          <a:lnRef idx="1">
+            <a:schemeClr val="accent1"/>
+          </a:lnRef>
+          <a:fillRef idx="3">
+            <a:schemeClr val="accent1"/>
+          </a:fillRef>
+          <a:effectRef idx="2">
+            <a:schemeClr val="accent1"/>
+          </a:effectRef>
+          <a:fontRef idx="minor">
+            <a:schemeClr val="lt1"/>
+          </a:fontRef>
+        </p:style>
+        <p:txBody>
+          <a:bodyPr rtlCol="0" anchor="ctr"/>
+          <a:lstStyle/>
+          <a:p>
+            <a:pPr algn="ctr"/>
+          </a:p>
+        </p:txBody>
+      </p:sp>
+      <p:sp>
+        <p:nvSpPr>
+          <p:cNvPr id="49" name="TextBox 48"/>
+          <p:cNvSpPr txBox="1"/>
+          <p:nvPr/>
+        </p:nvSpPr>
+        <p:spPr>
+          <a:xfrm>
+            <a:off x="10789920" y="4036423"/>
+            <a:ext cx="1188720" cy="182880"/>
+          </a:xfrm>
+          <a:prstGeom prst="rect">
+            <a:avLst/>
+          </a:prstGeom>
+          <a:noFill/>
+          <a:effectLst/>
+        </p:spPr>
+        <p:txBody>
+          <a:bodyPr wrap="square" lIns="0" rIns="0" tIns="0" bIns="0" anchor="ctr">
+            <a:spAutoFit/>
+          </a:bodyPr>
+          <a:lstStyle/>
+          <a:p>
+            <a:pPr algn="l"/>
+            <a:r>
+              <a:rPr sz="800" b="1" i="0">
+                <a:solidFill>
+                  <a:srgbClr val="D4A300"/>
+                </a:solidFill>
+                <a:latin typeface="Arial"/>
+              </a:rPr>
+              <a:t>P = 0.001</a:t>
+            </a:r>
+          </a:p>
+        </p:txBody>
+      </p:sp>
+      <p:sp>
+        <p:nvSpPr>
+          <p:cNvPr id="50" name="TextBox 49"/>
+          <p:cNvSpPr txBox="1"/>
+          <p:nvPr/>
+        </p:nvSpPr>
+        <p:spPr>
+          <a:xfrm>
+            <a:off x="12024360" y="4036423"/>
+            <a:ext cx="822960" cy="182880"/>
+          </a:xfrm>
+          <a:prstGeom prst="rect">
+            <a:avLst/>
+          </a:prstGeom>
+          <a:noFill/>
+          <a:effectLst/>
+        </p:spPr>
+        <p:txBody>
+          <a:bodyPr wrap="square" lIns="0" rIns="0" tIns="0" bIns="0" anchor="ctr">
+            <a:spAutoFit/>
+          </a:bodyPr>
+          <a:lstStyle/>
+          <a:p>
+            <a:pPr algn="l"/>
+            <a:r>
+              <a:rPr sz="800" b="0" i="0">
+                <a:solidFill>
+                  <a:srgbClr val="BBBBBB"/>
+                </a:solidFill>
+                <a:latin typeface="Arial"/>
+              </a:rPr>
+              <a:t>N=816</a:t>
+            </a:r>
+          </a:p>
+        </p:txBody>
+      </p:sp>
+      <p:sp>
+        <p:nvSpPr>
+          <p:cNvPr id="51" name="TextBox 50"/>
+          <p:cNvSpPr txBox="1"/>
+          <p:nvPr/>
+        </p:nvSpPr>
+        <p:spPr>
+          <a:xfrm>
+            <a:off x="182880" y="4689566"/>
+            <a:ext cx="2651760" cy="182880"/>
+          </a:xfrm>
+          <a:prstGeom prst="rect">
+            <a:avLst/>
+          </a:prstGeom>
+          <a:noFill/>
+          <a:effectLst/>
+        </p:spPr>
+        <p:txBody>
+          <a:bodyPr wrap="square" lIns="0" rIns="0" tIns="0" bIns="0" anchor="ctr">
+            <a:spAutoFit/>
+          </a:bodyPr>
+          <a:lstStyle/>
+          <a:p>
+            <a:pPr algn="r"/>
+            <a:r>
+              <a:rPr sz="900" b="1" i="0">
+                <a:solidFill>
+                  <a:srgbClr val="8A2B4C"/>
+                </a:solidFill>
+                <a:latin typeface="Arial"/>
+              </a:rPr>
+              <a:t>T-cell infiltration</a:t>
+            </a:r>
+          </a:p>
+        </p:txBody>
+      </p:sp>
+      <p:sp>
+        <p:nvSpPr>
+          <p:cNvPr id="52" name="Diamond 51"/>
+          <p:cNvSpPr/>
+          <p:nvPr/>
+        </p:nvSpPr>
+        <p:spPr>
+          <a:xfrm>
+            <a:off x="5960582" y="4662134"/>
+            <a:ext cx="237744" cy="237744"/>
+          </a:xfrm>
+          <a:prstGeom prst="diamond">
+            <a:avLst/>
+          </a:prstGeom>
+          <a:solidFill>
+            <a:srgbClr val="8A2B4C"/>
+          </a:solidFill>
+          <a:ln w="8890">
+            <a:solidFill>
+              <a:srgbClr val="222222"/>
+            </a:solidFill>
+          </a:ln>
+          <a:effectLst/>
+        </p:spPr>
+        <p:style>
+          <a:lnRef idx="1">
+            <a:schemeClr val="accent1"/>
+          </a:lnRef>
+          <a:fillRef idx="3">
+            <a:schemeClr val="accent1"/>
+          </a:fillRef>
+          <a:effectRef idx="2">
+            <a:schemeClr val="accent1"/>
+          </a:effectRef>
+          <a:fontRef idx="minor">
+            <a:schemeClr val="lt1"/>
+          </a:fontRef>
+        </p:style>
+        <p:txBody>
+          <a:bodyPr rtlCol="0" anchor="ctr"/>
+          <a:lstStyle/>
+          <a:p>
+            <a:pPr algn="ctr"/>
+          </a:p>
+        </p:txBody>
+      </p:sp>
+      <p:sp>
+        <p:nvSpPr>
+          <p:cNvPr id="53" name="TextBox 52"/>
+          <p:cNvSpPr txBox="1"/>
+          <p:nvPr/>
+        </p:nvSpPr>
+        <p:spPr>
+          <a:xfrm>
+            <a:off x="10789920" y="4689566"/>
+            <a:ext cx="1188720" cy="182880"/>
+          </a:xfrm>
+          <a:prstGeom prst="rect">
+            <a:avLst/>
+          </a:prstGeom>
+          <a:noFill/>
+          <a:effectLst/>
+        </p:spPr>
+        <p:txBody>
+          <a:bodyPr wrap="square" lIns="0" rIns="0" tIns="0" bIns="0" anchor="ctr">
+            <a:spAutoFit/>
+          </a:bodyPr>
+          <a:lstStyle/>
+          <a:p>
+            <a:pPr algn="l"/>
+            <a:r>
+              <a:rPr sz="800" b="0" i="0">
+                <a:solidFill>
+                  <a:srgbClr val="222222"/>
+                </a:solidFill>
+                <a:latin typeface="Arial"/>
+              </a:rPr>
+              <a:t>P = 0.399</a:t>
+            </a:r>
+          </a:p>
+        </p:txBody>
+      </p:sp>
+      <p:sp>
+        <p:nvSpPr>
+          <p:cNvPr id="54" name="TextBox 53"/>
+          <p:cNvSpPr txBox="1"/>
+          <p:nvPr/>
+        </p:nvSpPr>
+        <p:spPr>
+          <a:xfrm>
+            <a:off x="12024360" y="4689566"/>
+            <a:ext cx="822960" cy="182880"/>
+          </a:xfrm>
+          <a:prstGeom prst="rect">
+            <a:avLst/>
+          </a:prstGeom>
+          <a:noFill/>
+          <a:effectLst/>
+        </p:spPr>
+        <p:txBody>
+          <a:bodyPr wrap="square" lIns="0" rIns="0" tIns="0" bIns="0" anchor="ctr">
+            <a:spAutoFit/>
+          </a:bodyPr>
+          <a:lstStyle/>
+          <a:p>
+            <a:pPr algn="l"/>
+            <a:r>
+              <a:rPr sz="800" b="0" i="0">
+                <a:solidFill>
+                  <a:srgbClr val="BBBBBB"/>
+                </a:solidFill>
+                <a:latin typeface="Arial"/>
+              </a:rPr>
+              <a:t>N=518</a:t>
+            </a:r>
+          </a:p>
+        </p:txBody>
+      </p:sp>
+      <p:sp>
+        <p:nvSpPr>
+          <p:cNvPr id="55" name="TextBox 54"/>
+          <p:cNvSpPr txBox="1"/>
+          <p:nvPr/>
+        </p:nvSpPr>
+        <p:spPr>
+          <a:xfrm>
+            <a:off x="182880" y="5342709"/>
+            <a:ext cx="2651760" cy="182880"/>
+          </a:xfrm>
+          <a:prstGeom prst="rect">
+            <a:avLst/>
+          </a:prstGeom>
+          <a:noFill/>
+          <a:effectLst/>
+        </p:spPr>
+        <p:txBody>
+          <a:bodyPr wrap="square" lIns="0" rIns="0" tIns="0" bIns="0" anchor="ctr">
+            <a:spAutoFit/>
+          </a:bodyPr>
+          <a:lstStyle/>
+          <a:p>
+            <a:pPr algn="r"/>
+            <a:r>
+              <a:rPr sz="900" b="1" i="0">
+                <a:solidFill>
+                  <a:srgbClr val="8A2B4C"/>
+                </a:solidFill>
+                <a:latin typeface="Arial"/>
+              </a:rPr>
+              <a:t>B-cell infiltration</a:t>
+            </a:r>
+          </a:p>
+        </p:txBody>
+      </p:sp>
+      <p:sp>
+        <p:nvSpPr>
+          <p:cNvPr id="56" name="Diamond 55"/>
+          <p:cNvSpPr/>
+          <p:nvPr/>
+        </p:nvSpPr>
+        <p:spPr>
+          <a:xfrm>
+            <a:off x="5338790" y="5315277"/>
+            <a:ext cx="237744" cy="237744"/>
+          </a:xfrm>
+          <a:prstGeom prst="diamond">
+            <a:avLst/>
+          </a:prstGeom>
+          <a:solidFill>
+            <a:srgbClr val="8A2B4C"/>
+          </a:solidFill>
+          <a:ln w="8890">
+            <a:solidFill>
+              <a:srgbClr val="222222"/>
+            </a:solidFill>
+          </a:ln>
+          <a:effectLst/>
+        </p:spPr>
+        <p:style>
+          <a:lnRef idx="1">
+            <a:schemeClr val="accent1"/>
+          </a:lnRef>
+          <a:fillRef idx="3">
+            <a:schemeClr val="accent1"/>
+          </a:fillRef>
+          <a:effectRef idx="2">
+            <a:schemeClr val="accent1"/>
+          </a:effectRef>
+          <a:fontRef idx="minor">
+            <a:schemeClr val="lt1"/>
+          </a:fontRef>
+        </p:style>
+        <p:txBody>
+          <a:bodyPr rtlCol="0" anchor="ctr"/>
+          <a:lstStyle/>
+          <a:p>
+            <a:pPr algn="ctr"/>
+          </a:p>
+        </p:txBody>
+      </p:sp>
+      <p:sp>
+        <p:nvSpPr>
+          <p:cNvPr id="57" name="TextBox 56"/>
+          <p:cNvSpPr txBox="1"/>
+          <p:nvPr/>
+        </p:nvSpPr>
+        <p:spPr>
+          <a:xfrm>
+            <a:off x="10789920" y="5342709"/>
+            <a:ext cx="1188720" cy="182880"/>
+          </a:xfrm>
+          <a:prstGeom prst="rect">
+            <a:avLst/>
+          </a:prstGeom>
+          <a:noFill/>
+          <a:effectLst/>
+        </p:spPr>
+        <p:txBody>
+          <a:bodyPr wrap="square" lIns="0" rIns="0" tIns="0" bIns="0" anchor="ctr">
+            <a:spAutoFit/>
+          </a:bodyPr>
+          <a:lstStyle/>
+          <a:p>
+            <a:pPr algn="l"/>
+            <a:r>
               <a:rPr sz="800" b="0" i="0">
                 <a:solidFill>
                   <a:srgbClr val="222222"/>
@@ -5152,13 +5196,13 @@
       </p:sp>
       <p:sp>
         <p:nvSpPr>
-          <p:cNvPr id="57" name="TextBox 56"/>
+          <p:cNvPr id="58" name="TextBox 57"/>
           <p:cNvSpPr txBox="1"/>
           <p:nvPr/>
         </p:nvSpPr>
         <p:spPr>
           <a:xfrm>
-            <a:off x="12298680" y="5342709"/>
+            <a:off x="12024360" y="5342709"/>
             <a:ext cx="822960" cy="182880"/>
           </a:xfrm>
           <a:prstGeom prst="rect">
@@ -5188,13 +5232,13 @@
       </p:sp>
       <p:sp>
         <p:nvSpPr>
-          <p:cNvPr id="58" name="Diamond 57"/>
+          <p:cNvPr id="59" name="Diamond 58"/>
           <p:cNvSpPr/>
           <p:nvPr/>
         </p:nvSpPr>
         <p:spPr>
           <a:xfrm>
-            <a:off x="9601200" y="822960"/>
+            <a:off x="8686800" y="777240"/>
             <a:ext cx="182880" cy="182880"/>
           </a:xfrm>
           <a:prstGeom prst="diamond">
@@ -5234,14 +5278,14 @@
       </p:sp>
       <p:sp>
         <p:nvSpPr>
-          <p:cNvPr id="59" name="TextBox 58"/>
+          <p:cNvPr id="60" name="TextBox 59"/>
           <p:cNvSpPr txBox="1"/>
           <p:nvPr/>
         </p:nvSpPr>
         <p:spPr>
           <a:xfrm>
-            <a:off x="9829800" y="822960"/>
-            <a:ext cx="2286000" cy="182880"/>
+            <a:off x="8915400" y="777240"/>
+            <a:ext cx="3200400" cy="182880"/>
           </a:xfrm>
           <a:prstGeom prst="rect">
             <a:avLst/>
@@ -5257,33 +5301,33 @@
           <a:p>
             <a:pPr algn="l"/>
             <a:r>
-              <a:rPr sz="900" b="0" i="0">
+              <a:rPr sz="900" b="1" i="0">
                 <a:solidFill>
                   <a:srgbClr val="222222"/>
                 </a:solidFill>
                 <a:latin typeface="Arial"/>
               </a:rPr>
-              <a:t>restricted meta (primary)</a:t>
-            </a:r>
-          </a:p>
-        </p:txBody>
-      </p:sp>
-      <p:sp>
-        <p:nvSpPr>
-          <p:cNvPr id="60" name="Diamond 59"/>
+              <a:t>primary meta (restricted 5-cohort)</a:t>
+            </a:r>
+          </a:p>
+        </p:txBody>
+      </p:sp>
+      <p:sp>
+        <p:nvSpPr>
+          <p:cNvPr id="61" name="Diamond 60"/>
           <p:cNvSpPr/>
           <p:nvPr/>
         </p:nvSpPr>
         <p:spPr>
           <a:xfrm>
-            <a:off x="9610344" y="1014984"/>
+            <a:off x="8695944" y="969264"/>
             <a:ext cx="164592" cy="164592"/>
           </a:xfrm>
           <a:prstGeom prst="diamond">
             <a:avLst/>
           </a:prstGeom>
           <a:noFill/>
-          <a:ln w="15240">
+          <a:ln w="19050">
             <a:solidFill>
               <a:srgbClr val="0E4A68"/>
             </a:solidFill>
@@ -5314,14 +5358,14 @@
       </p:sp>
       <p:sp>
         <p:nvSpPr>
-          <p:cNvPr id="61" name="TextBox 60"/>
+          <p:cNvPr id="62" name="TextBox 61"/>
           <p:cNvSpPr txBox="1"/>
           <p:nvPr/>
         </p:nvSpPr>
         <p:spPr>
           <a:xfrm>
-            <a:off x="9829800" y="1005840"/>
-            <a:ext cx="2286000" cy="182880"/>
+            <a:off x="8915400" y="960120"/>
+            <a:ext cx="3200400" cy="182880"/>
           </a:xfrm>
           <a:prstGeom prst="rect">
             <a:avLst/>
@@ -5343,7 +5387,87 @@
                 </a:solidFill>
                 <a:latin typeface="Arial"/>
               </a:rPr>
-              <a:t>5-cohort only (CD8 cyto)</a:t>
+              <a:t>hollow = 5-cohort-only comparison</a:t>
+            </a:r>
+          </a:p>
+        </p:txBody>
+      </p:sp>
+      <p:sp>
+        <p:nvSpPr>
+          <p:cNvPr id="63" name="Rectangle 62"/>
+          <p:cNvSpPr/>
+          <p:nvPr/>
+        </p:nvSpPr>
+        <p:spPr>
+          <a:xfrm>
+            <a:off x="8686800" y="1280160"/>
+            <a:ext cx="164592" cy="109728"/>
+          </a:xfrm>
+          <a:prstGeom prst="rect">
+            <a:avLst/>
+          </a:prstGeom>
+          <a:solidFill>
+            <a:srgbClr val="EEF7F4"/>
+          </a:solidFill>
+          <a:ln>
+            <a:noFill/>
+          </a:ln>
+          <a:effectLst/>
+        </p:spPr>
+        <p:style>
+          <a:lnRef idx="1">
+            <a:schemeClr val="accent1"/>
+          </a:lnRef>
+          <a:fillRef idx="3">
+            <a:schemeClr val="accent1"/>
+          </a:fillRef>
+          <a:effectRef idx="2">
+            <a:schemeClr val="accent1"/>
+          </a:effectRef>
+          <a:fontRef idx="minor">
+            <a:schemeClr val="lt1"/>
+          </a:fontRef>
+        </p:style>
+        <p:txBody>
+          <a:bodyPr rtlCol="0" anchor="ctr"/>
+          <a:lstStyle/>
+          <a:p>
+            <a:pPr algn="ctr"/>
+          </a:p>
+        </p:txBody>
+      </p:sp>
+      <p:sp>
+        <p:nvSpPr>
+          <p:cNvPr id="64" name="TextBox 63"/>
+          <p:cNvSpPr txBox="1"/>
+          <p:nvPr/>
+        </p:nvSpPr>
+        <p:spPr>
+          <a:xfrm>
+            <a:off x="8887968" y="1261872"/>
+            <a:ext cx="3200400" cy="182880"/>
+          </a:xfrm>
+          <a:prstGeom prst="rect">
+            <a:avLst/>
+          </a:prstGeom>
+          <a:noFill/>
+          <a:effectLst/>
+        </p:spPr>
+        <p:txBody>
+          <a:bodyPr wrap="square" lIns="0" rIns="0" tIns="0" bIns="0" anchor="ctr">
+            <a:spAutoFit/>
+          </a:bodyPr>
+          <a:lstStyle/>
+          <a:p>
+            <a:pPr algn="l"/>
+            <a:r>
+              <a:rPr sz="900" b="0" i="0">
+                <a:solidFill>
+                  <a:srgbClr val="222222"/>
+                </a:solidFill>
+                <a:latin typeface="Arial"/>
+              </a:rPr>
+              <a:t>favorable zone (Z &gt; 1.96)</a:t>
             </a:r>
           </a:p>
         </p:txBody>
@@ -5433,7 +5557,7 @@
                 </a:solidFill>
                 <a:latin typeface="Arial"/>
               </a:rPr>
-              <a:t>Akiyoshi 2023 alternative-statistic sensitivity — 4 choices × 6-source CD8 pool (5 GEO + Akiyoshi)</a:t>
+              <a:t>Akiyoshi 2023 alternative-statistic sensitivity — 4 variants × 6-source meta</a:t>
             </a:r>
           </a:p>
         </p:txBody>
@@ -5980,7 +6104,51 @@
       </p:sp>
       <p:sp>
         <p:nvSpPr>
-          <p:cNvPr id="19" name="TextBox 18"/>
+          <p:cNvPr id="19" name="Rectangle 18"/>
+          <p:cNvSpPr/>
+          <p:nvPr/>
+        </p:nvSpPr>
+        <p:spPr>
+          <a:xfrm>
+            <a:off x="5454396" y="1188720"/>
+            <a:ext cx="5518404" cy="4572000"/>
+          </a:xfrm>
+          <a:prstGeom prst="rect">
+            <a:avLst/>
+          </a:prstGeom>
+          <a:solidFill>
+            <a:srgbClr val="EEF7F4"/>
+          </a:solidFill>
+          <a:ln>
+            <a:noFill/>
+          </a:ln>
+          <a:effectLst/>
+        </p:spPr>
+        <p:style>
+          <a:lnRef idx="1">
+            <a:schemeClr val="accent1"/>
+          </a:lnRef>
+          <a:fillRef idx="3">
+            <a:schemeClr val="accent1"/>
+          </a:fillRef>
+          <a:effectRef idx="2">
+            <a:schemeClr val="accent1"/>
+          </a:effectRef>
+          <a:fontRef idx="minor">
+            <a:schemeClr val="lt1"/>
+          </a:fontRef>
+        </p:style>
+        <p:txBody>
+          <a:bodyPr rtlCol="0" anchor="ctr"/>
+          <a:lstStyle/>
+          <a:p>
+            <a:pPr algn="ctr"/>
+          </a:p>
+        </p:txBody>
+      </p:sp>
+      <p:sp>
+        <p:nvSpPr>
+          <p:cNvPr id="20" name="TextBox 19"/>
           <p:cNvSpPr txBox="1"/>
           <p:nvPr/>
         </p:nvSpPr>
@@ -6016,7 +6184,7 @@
       </p:sp>
       <p:sp>
         <p:nvSpPr>
-          <p:cNvPr id="20" name="Diamond 19"/>
+          <p:cNvPr id="21" name="Diamond 20"/>
           <p:cNvSpPr/>
           <p:nvPr/>
         </p:nvSpPr>
@@ -6062,7 +6230,51 @@
       </p:sp>
       <p:sp>
         <p:nvSpPr>
-          <p:cNvPr id="21" name="TextBox 20"/>
+          <p:cNvPr id="22" name="5-Point Star 21"/>
+          <p:cNvSpPr/>
+          <p:nvPr/>
+        </p:nvSpPr>
+        <p:spPr>
+          <a:xfrm>
+            <a:off x="8359902" y="1540764"/>
+            <a:ext cx="164592" cy="164592"/>
+          </a:xfrm>
+          <a:prstGeom prst="star5">
+            <a:avLst/>
+          </a:prstGeom>
+          <a:solidFill>
+            <a:srgbClr val="D4A300"/>
+          </a:solidFill>
+          <a:ln>
+            <a:noFill/>
+          </a:ln>
+          <a:effectLst/>
+        </p:spPr>
+        <p:style>
+          <a:lnRef idx="1">
+            <a:schemeClr val="accent1"/>
+          </a:lnRef>
+          <a:fillRef idx="3">
+            <a:schemeClr val="accent1"/>
+          </a:fillRef>
+          <a:effectRef idx="2">
+            <a:schemeClr val="accent1"/>
+          </a:effectRef>
+          <a:fontRef idx="minor">
+            <a:schemeClr val="lt1"/>
+          </a:fontRef>
+        </p:style>
+        <p:txBody>
+          <a:bodyPr rtlCol="0" anchor="ctr"/>
+          <a:lstStyle/>
+          <a:p>
+            <a:pPr algn="ctr"/>
+          </a:p>
+        </p:txBody>
+      </p:sp>
+      <p:sp>
+        <p:nvSpPr>
+          <p:cNvPr id="23" name="TextBox 22"/>
           <p:cNvSpPr txBox="1"/>
           <p:nvPr/>
         </p:nvSpPr>
@@ -6098,7 +6310,7 @@
       </p:sp>
       <p:sp>
         <p:nvSpPr>
-          <p:cNvPr id="22" name="TextBox 21"/>
+          <p:cNvPr id="24" name="TextBox 23"/>
           <p:cNvSpPr txBox="1"/>
           <p:nvPr/>
         </p:nvSpPr>
@@ -6134,7 +6346,7 @@
       </p:sp>
       <p:sp>
         <p:nvSpPr>
-          <p:cNvPr id="23" name="Diamond 22"/>
+          <p:cNvPr id="25" name="Diamond 24"/>
           <p:cNvSpPr/>
           <p:nvPr/>
         </p:nvSpPr>
@@ -6180,7 +6392,7 @@
       </p:sp>
       <p:sp>
         <p:nvSpPr>
-          <p:cNvPr id="24" name="TextBox 23"/>
+          <p:cNvPr id="26" name="TextBox 25"/>
           <p:cNvSpPr txBox="1"/>
           <p:nvPr/>
         </p:nvSpPr>
@@ -6216,7 +6428,7 @@
       </p:sp>
       <p:sp>
         <p:nvSpPr>
-          <p:cNvPr id="25" name="TextBox 24"/>
+          <p:cNvPr id="27" name="TextBox 26"/>
           <p:cNvSpPr txBox="1"/>
           <p:nvPr/>
         </p:nvSpPr>
@@ -6252,7 +6464,7 @@
       </p:sp>
       <p:sp>
         <p:nvSpPr>
-          <p:cNvPr id="26" name="Diamond 25"/>
+          <p:cNvPr id="28" name="Diamond 27"/>
           <p:cNvSpPr/>
           <p:nvPr/>
         </p:nvSpPr>
@@ -6298,7 +6510,7 @@
       </p:sp>
       <p:sp>
         <p:nvSpPr>
-          <p:cNvPr id="27" name="TextBox 26"/>
+          <p:cNvPr id="29" name="TextBox 28"/>
           <p:cNvSpPr txBox="1"/>
           <p:nvPr/>
         </p:nvSpPr>
@@ -6334,7 +6546,7 @@
       </p:sp>
       <p:sp>
         <p:nvSpPr>
-          <p:cNvPr id="28" name="TextBox 27"/>
+          <p:cNvPr id="30" name="TextBox 29"/>
           <p:cNvSpPr txBox="1"/>
           <p:nvPr/>
         </p:nvSpPr>
@@ -6370,7 +6582,7 @@
       </p:sp>
       <p:sp>
         <p:nvSpPr>
-          <p:cNvPr id="29" name="Diamond 28"/>
+          <p:cNvPr id="31" name="Diamond 30"/>
           <p:cNvSpPr/>
           <p:nvPr/>
         </p:nvSpPr>
@@ -6416,7 +6628,7 @@
       </p:sp>
       <p:sp>
         <p:nvSpPr>
-          <p:cNvPr id="30" name="TextBox 29"/>
+          <p:cNvPr id="32" name="TextBox 31"/>
           <p:cNvSpPr txBox="1"/>
           <p:nvPr/>
         </p:nvSpPr>
@@ -6452,14 +6664,14 @@
       </p:sp>
       <p:sp>
         <p:nvSpPr>
-          <p:cNvPr id="31" name="TextBox 30"/>
+          <p:cNvPr id="33" name="TextBox 32"/>
           <p:cNvSpPr txBox="1"/>
           <p:nvPr/>
         </p:nvSpPr>
         <p:spPr>
           <a:xfrm>
             <a:off x="3200400" y="6263640"/>
-            <a:ext cx="8229600" cy="320040"/>
+            <a:ext cx="7772400" cy="274320"/>
           </a:xfrm>
           <a:prstGeom prst="rect">
             <a:avLst/>
